--- a/workspace/github-actions-copilot.pptx
+++ b/workspace/github-actions-copilot.pptx
@@ -2047,7 +2047,7 @@
             <a:avLst/>
           </a:prstGeom>
           <a:solidFill>
-            <a:srgbClr val="2196F3"/>
+            <a:srgbClr val="26C6DA"/>
           </a:solidFill>
           <a:ln/>
         </p:spPr>
@@ -2095,7 +2095,7 @@
             <a:r>
               <a:rPr lang="en-US" sz="4400" b="1" dirty="0">
                 <a:solidFill>
-                  <a:srgbClr val="181B24"/>
+                  <a:srgbClr val="1A237E"/>
                 </a:solidFill>
                 <a:latin typeface="Arial" pitchFamily="34" charset="0"/>
                 <a:ea typeface="Arial" pitchFamily="34" charset="-122"/>
@@ -2134,7 +2134,7 @@
             <a:r>
               <a:rPr lang="en-US" sz="1800" b="1" dirty="0">
                 <a:solidFill>
-                  <a:srgbClr val="FF6B35"/>
+                  <a:srgbClr val="5E35B1"/>
                 </a:solidFill>
                 <a:latin typeface="Arial" pitchFamily="34" charset="0"/>
                 <a:ea typeface="Arial" pitchFamily="34" charset="-122"/>
@@ -2193,7 +2193,7 @@
             <a:avLst/>
           </a:prstGeom>
           <a:solidFill>
-            <a:srgbClr val="181B24"/>
+            <a:srgbClr val="1A237E"/>
           </a:solidFill>
           <a:ln/>
         </p:spPr>
@@ -2280,7 +2280,7 @@
             <a:r>
               <a:rPr lang="en-US" sz="1400" b="1" dirty="0">
                 <a:solidFill>
-                  <a:srgbClr val="2C3E50"/>
+                  <a:srgbClr val="263238"/>
                 </a:solidFill>
                 <a:latin typeface="Arial" pitchFamily="34" charset="0"/>
                 <a:ea typeface="Arial" pitchFamily="34" charset="-122"/>
@@ -2326,7 +2326,7 @@
             <a:r>
               <a:rPr lang="en-US" sz="1200" dirty="0">
                 <a:solidFill>
-                  <a:srgbClr val="2C3E50"/>
+                  <a:srgbClr val="263238"/>
                 </a:solidFill>
                 <a:latin typeface="Arial" pitchFamily="34" charset="0"/>
                 <a:ea typeface="Arial" pitchFamily="34" charset="-122"/>
@@ -2350,7 +2350,7 @@
             <a:r>
               <a:rPr lang="en-US" sz="1200" dirty="0">
                 <a:solidFill>
-                  <a:srgbClr val="2C3E50"/>
+                  <a:srgbClr val="263238"/>
                 </a:solidFill>
                 <a:latin typeface="Arial" pitchFamily="34" charset="0"/>
                 <a:ea typeface="Arial" pitchFamily="34" charset="-122"/>
@@ -2374,7 +2374,7 @@
             <a:r>
               <a:rPr lang="en-US" sz="1200" dirty="0">
                 <a:solidFill>
-                  <a:srgbClr val="2C3E50"/>
+                  <a:srgbClr val="263238"/>
                 </a:solidFill>
                 <a:latin typeface="Arial" pitchFamily="34" charset="0"/>
                 <a:ea typeface="Arial" pitchFamily="34" charset="-122"/>
@@ -2398,7 +2398,7 @@
             <a:r>
               <a:rPr lang="en-US" sz="1200" dirty="0">
                 <a:solidFill>
-                  <a:srgbClr val="2C3E50"/>
+                  <a:srgbClr val="263238"/>
                 </a:solidFill>
                 <a:latin typeface="Arial" pitchFamily="34" charset="0"/>
                 <a:ea typeface="Arial" pitchFamily="34" charset="-122"/>
@@ -2422,7 +2422,7 @@
             <a:r>
               <a:rPr lang="en-US" sz="1200" dirty="0">
                 <a:solidFill>
-                  <a:srgbClr val="2C3E50"/>
+                  <a:srgbClr val="263238"/>
                 </a:solidFill>
                 <a:latin typeface="Arial" pitchFamily="34" charset="0"/>
                 <a:ea typeface="Arial" pitchFamily="34" charset="-122"/>
@@ -2446,7 +2446,7 @@
             <a:r>
               <a:rPr lang="en-US" sz="1200" dirty="0">
                 <a:solidFill>
-                  <a:srgbClr val="2C3E50"/>
+                  <a:srgbClr val="263238"/>
                 </a:solidFill>
                 <a:latin typeface="Arial" pitchFamily="34" charset="0"/>
                 <a:ea typeface="Arial" pitchFamily="34" charset="-122"/>
@@ -2470,7 +2470,7 @@
             <a:r>
               <a:rPr lang="en-US" sz="1200" dirty="0">
                 <a:solidFill>
-                  <a:srgbClr val="2C3E50"/>
+                  <a:srgbClr val="263238"/>
                 </a:solidFill>
                 <a:latin typeface="Arial" pitchFamily="34" charset="0"/>
                 <a:ea typeface="Arial" pitchFamily="34" charset="-122"/>
@@ -2494,7 +2494,7 @@
             <a:r>
               <a:rPr lang="en-US" sz="1200" dirty="0">
                 <a:solidFill>
-                  <a:srgbClr val="2C3E50"/>
+                  <a:srgbClr val="263238"/>
                 </a:solidFill>
                 <a:latin typeface="Arial" pitchFamily="34" charset="0"/>
                 <a:ea typeface="Arial" pitchFamily="34" charset="-122"/>
@@ -2518,7 +2518,7 @@
             <a:r>
               <a:rPr lang="en-US" sz="1200" dirty="0">
                 <a:solidFill>
-                  <a:srgbClr val="2C3E50"/>
+                  <a:srgbClr val="263238"/>
                 </a:solidFill>
                 <a:latin typeface="Arial" pitchFamily="34" charset="0"/>
                 <a:ea typeface="Arial" pitchFamily="34" charset="-122"/>
@@ -2542,7 +2542,7 @@
             <a:r>
               <a:rPr lang="en-US" sz="1200" dirty="0">
                 <a:solidFill>
-                  <a:srgbClr val="2C3E50"/>
+                  <a:srgbClr val="263238"/>
                 </a:solidFill>
                 <a:latin typeface="Arial" pitchFamily="34" charset="0"/>
                 <a:ea typeface="Arial" pitchFamily="34" charset="-122"/>
@@ -2566,7 +2566,7 @@
             <a:r>
               <a:rPr lang="en-US" sz="1200" dirty="0">
                 <a:solidFill>
-                  <a:srgbClr val="2C3E50"/>
+                  <a:srgbClr val="263238"/>
                 </a:solidFill>
                 <a:latin typeface="Arial" pitchFamily="34" charset="0"/>
                 <a:ea typeface="Arial" pitchFamily="34" charset="-122"/>
@@ -2590,7 +2590,7 @@
             <a:r>
               <a:rPr lang="en-US" sz="1200" dirty="0">
                 <a:solidFill>
-                  <a:srgbClr val="2C3E50"/>
+                  <a:srgbClr val="263238"/>
                 </a:solidFill>
                 <a:latin typeface="Arial" pitchFamily="34" charset="0"/>
                 <a:ea typeface="Arial" pitchFamily="34" charset="-122"/>
@@ -2614,7 +2614,7 @@
             <a:r>
               <a:rPr lang="en-US" sz="1200" dirty="0">
                 <a:solidFill>
-                  <a:srgbClr val="2C3E50"/>
+                  <a:srgbClr val="263238"/>
                 </a:solidFill>
                 <a:latin typeface="Arial" pitchFamily="34" charset="0"/>
                 <a:ea typeface="Arial" pitchFamily="34" charset="-122"/>
@@ -2675,7 +2675,7 @@
           <a:noFill/>
           <a:ln w="47625">
             <a:solidFill>
-              <a:srgbClr val="FF6B35"/>
+              <a:srgbClr val="5E35B1"/>
             </a:solidFill>
             <a:prstDash val="solid"/>
           </a:ln>
@@ -2711,7 +2711,7 @@
             <a:r>
               <a:rPr lang="en-US" sz="1200" b="1" dirty="0">
                 <a:solidFill>
-                  <a:srgbClr val="2C3E50"/>
+                  <a:srgbClr val="263238"/>
                 </a:solidFill>
                 <a:latin typeface="Arial" pitchFamily="34" charset="0"/>
                 <a:ea typeface="Arial" pitchFamily="34" charset="-122"/>
@@ -2728,7 +2728,7 @@
             <a:r>
               <a:rPr lang="en-US" sz="1200" dirty="0">
                 <a:solidFill>
-                  <a:srgbClr val="2C3E50"/>
+                  <a:srgbClr val="263238"/>
                 </a:solidFill>
                 <a:latin typeface="Arial" pitchFamily="34" charset="0"/>
                 <a:ea typeface="Arial" pitchFamily="34" charset="-122"/>
@@ -2787,7 +2787,7 @@
             <a:avLst/>
           </a:prstGeom>
           <a:solidFill>
-            <a:srgbClr val="181B24"/>
+            <a:srgbClr val="1A237E"/>
           </a:solidFill>
           <a:ln/>
         </p:spPr>
@@ -2874,7 +2874,7 @@
             <a:r>
               <a:rPr lang="en-US" sz="1400" b="1" dirty="0">
                 <a:solidFill>
-                  <a:srgbClr val="2C3E50"/>
+                  <a:srgbClr val="263238"/>
                 </a:solidFill>
                 <a:latin typeface="Arial" pitchFamily="34" charset="0"/>
                 <a:ea typeface="Arial" pitchFamily="34" charset="-122"/>
@@ -2920,7 +2920,7 @@
             <a:r>
               <a:rPr lang="en-US" sz="1300" b="1" dirty="0">
                 <a:solidFill>
-                  <a:srgbClr val="2196F3"/>
+                  <a:srgbClr val="26C6DA"/>
                 </a:solidFill>
                 <a:latin typeface="Arial" pitchFamily="34" charset="0"/>
                 <a:ea typeface="Arial" pitchFamily="34" charset="-122"/>
@@ -2940,7 +2940,7 @@
             <a:r>
               <a:rPr lang="en-US" sz="1300" dirty="0">
                 <a:solidFill>
-                  <a:srgbClr val="2C3E50"/>
+                  <a:srgbClr val="263238"/>
                 </a:solidFill>
                 <a:latin typeface="Arial" pitchFamily="34" charset="0"/>
                 <a:ea typeface="Arial" pitchFamily="34" charset="-122"/>
@@ -2964,7 +2964,7 @@
             <a:r>
               <a:rPr lang="en-US" sz="1300" dirty="0">
                 <a:solidFill>
-                  <a:srgbClr val="2C3E50"/>
+                  <a:srgbClr val="263238"/>
                 </a:solidFill>
                 <a:latin typeface="Arial" pitchFamily="34" charset="0"/>
                 <a:ea typeface="Arial" pitchFamily="34" charset="-122"/>
@@ -2988,7 +2988,7 @@
             <a:r>
               <a:rPr lang="en-US" sz="1300" dirty="0">
                 <a:solidFill>
-                  <a:srgbClr val="2C3E50"/>
+                  <a:srgbClr val="263238"/>
                 </a:solidFill>
                 <a:latin typeface="Arial" pitchFamily="34" charset="0"/>
                 <a:ea typeface="Arial" pitchFamily="34" charset="-122"/>
@@ -3012,7 +3012,7 @@
             <a:r>
               <a:rPr lang="en-US" sz="1300" b="1" dirty="0">
                 <a:solidFill>
-                  <a:srgbClr val="2196F3"/>
+                  <a:srgbClr val="26C6DA"/>
                 </a:solidFill>
                 <a:latin typeface="Arial" pitchFamily="34" charset="0"/>
                 <a:ea typeface="Arial" pitchFamily="34" charset="-122"/>
@@ -3032,7 +3032,7 @@
             <a:r>
               <a:rPr lang="en-US" sz="1300" dirty="0">
                 <a:solidFill>
-                  <a:srgbClr val="2C3E50"/>
+                  <a:srgbClr val="263238"/>
                 </a:solidFill>
                 <a:latin typeface="Arial" pitchFamily="34" charset="0"/>
                 <a:ea typeface="Arial" pitchFamily="34" charset="-122"/>
@@ -3056,7 +3056,7 @@
             <a:r>
               <a:rPr lang="en-US" sz="1300" b="1" dirty="0">
                 <a:solidFill>
-                  <a:srgbClr val="2196F3"/>
+                  <a:srgbClr val="26C6DA"/>
                 </a:solidFill>
                 <a:latin typeface="Arial" pitchFamily="34" charset="0"/>
                 <a:ea typeface="Arial" pitchFamily="34" charset="-122"/>
@@ -3076,7 +3076,7 @@
             <a:r>
               <a:rPr lang="en-US" sz="1300" dirty="0">
                 <a:solidFill>
-                  <a:srgbClr val="2C3E50"/>
+                  <a:srgbClr val="263238"/>
                 </a:solidFill>
                 <a:latin typeface="Arial" pitchFamily="34" charset="0"/>
                 <a:ea typeface="Arial" pitchFamily="34" charset="-122"/>
@@ -3100,7 +3100,7 @@
             <a:r>
               <a:rPr lang="en-US" sz="1300" b="1" dirty="0">
                 <a:solidFill>
-                  <a:srgbClr val="2196F3"/>
+                  <a:srgbClr val="26C6DA"/>
                 </a:solidFill>
                 <a:latin typeface="Arial" pitchFamily="34" charset="0"/>
                 <a:ea typeface="Arial" pitchFamily="34" charset="-122"/>
@@ -3120,7 +3120,7 @@
             <a:r>
               <a:rPr lang="en-US" sz="1300" dirty="0">
                 <a:solidFill>
-                  <a:srgbClr val="2C3E50"/>
+                  <a:srgbClr val="263238"/>
                 </a:solidFill>
                 <a:latin typeface="Arial" pitchFamily="34" charset="0"/>
                 <a:ea typeface="Arial" pitchFamily="34" charset="-122"/>
@@ -3144,7 +3144,7 @@
             <a:r>
               <a:rPr lang="en-US" sz="1300" b="1" dirty="0">
                 <a:solidFill>
-                  <a:srgbClr val="2196F3"/>
+                  <a:srgbClr val="26C6DA"/>
                 </a:solidFill>
                 <a:latin typeface="Arial" pitchFamily="34" charset="0"/>
                 <a:ea typeface="Arial" pitchFamily="34" charset="-122"/>
@@ -3164,7 +3164,7 @@
             <a:r>
               <a:rPr lang="en-US" sz="1300" dirty="0">
                 <a:solidFill>
-                  <a:srgbClr val="2C3E50"/>
+                  <a:srgbClr val="263238"/>
                 </a:solidFill>
                 <a:latin typeface="Arial" pitchFamily="34" charset="0"/>
                 <a:ea typeface="Arial" pitchFamily="34" charset="-122"/>
@@ -3210,7 +3210,7 @@
             <a:r>
               <a:rPr lang="en-US" sz="1200" dirty="0">
                 <a:solidFill>
-                  <a:srgbClr val="2C3E50"/>
+                  <a:srgbClr val="263238"/>
                 </a:solidFill>
                 <a:latin typeface="Arial" pitchFamily="34" charset="0"/>
                 <a:ea typeface="Arial" pitchFamily="34" charset="-122"/>
@@ -3234,7 +3234,7 @@
             <a:r>
               <a:rPr lang="en-US" sz="1200" dirty="0">
                 <a:solidFill>
-                  <a:srgbClr val="2C3E50"/>
+                  <a:srgbClr val="263238"/>
                 </a:solidFill>
                 <a:latin typeface="Arial" pitchFamily="34" charset="0"/>
                 <a:ea typeface="Arial" pitchFamily="34" charset="-122"/>
@@ -3293,7 +3293,7 @@
             <a:avLst/>
           </a:prstGeom>
           <a:solidFill>
-            <a:srgbClr val="181B24"/>
+            <a:srgbClr val="1A237E"/>
           </a:solidFill>
           <a:ln/>
         </p:spPr>
@@ -3380,7 +3380,7 @@
             <a:r>
               <a:rPr lang="en-US" sz="1200" b="1" dirty="0">
                 <a:solidFill>
-                  <a:srgbClr val="2C3E50"/>
+                  <a:srgbClr val="263238"/>
                 </a:solidFill>
                 <a:latin typeface="Arial" pitchFamily="34" charset="0"/>
                 <a:ea typeface="Arial" pitchFamily="34" charset="-122"/>
@@ -3426,7 +3426,7 @@
             <a:r>
               <a:rPr lang="en-US" sz="1100" dirty="0">
                 <a:solidFill>
-                  <a:srgbClr val="2C3E50"/>
+                  <a:srgbClr val="263238"/>
                 </a:solidFill>
                 <a:latin typeface="Arial" pitchFamily="34" charset="0"/>
                 <a:ea typeface="Arial" pitchFamily="34" charset="-122"/>
@@ -3450,7 +3450,7 @@
             <a:r>
               <a:rPr lang="en-US" sz="1100" dirty="0">
                 <a:solidFill>
-                  <a:srgbClr val="2C3E50"/>
+                  <a:srgbClr val="263238"/>
                 </a:solidFill>
                 <a:latin typeface="Arial" pitchFamily="34" charset="0"/>
                 <a:ea typeface="Arial" pitchFamily="34" charset="-122"/>
@@ -3474,7 +3474,7 @@
             <a:r>
               <a:rPr lang="en-US" sz="1100" dirty="0">
                 <a:solidFill>
-                  <a:srgbClr val="2C3E50"/>
+                  <a:srgbClr val="263238"/>
                 </a:solidFill>
                 <a:latin typeface="Arial" pitchFamily="34" charset="0"/>
                 <a:ea typeface="Arial" pitchFamily="34" charset="-122"/>
@@ -3519,7 +3519,7 @@
             <a:r>
               <a:rPr lang="en-US" sz="1200" b="1" dirty="0">
                 <a:solidFill>
-                  <a:srgbClr val="2C3E50"/>
+                  <a:srgbClr val="263238"/>
                 </a:solidFill>
                 <a:latin typeface="Arial" pitchFamily="34" charset="0"/>
                 <a:ea typeface="Arial" pitchFamily="34" charset="-122"/>
@@ -3565,7 +3565,7 @@
             <a:r>
               <a:rPr lang="en-US" sz="1100" b="1" dirty="0">
                 <a:solidFill>
-                  <a:srgbClr val="2196F3"/>
+                  <a:srgbClr val="26C6DA"/>
                 </a:solidFill>
                 <a:latin typeface="Arial" pitchFamily="34" charset="0"/>
                 <a:ea typeface="Arial" pitchFamily="34" charset="-122"/>
@@ -3585,7 +3585,7 @@
             <a:r>
               <a:rPr lang="en-US" sz="1100" dirty="0">
                 <a:solidFill>
-                  <a:srgbClr val="2C3E50"/>
+                  <a:srgbClr val="263238"/>
                 </a:solidFill>
                 <a:latin typeface="Arial" pitchFamily="34" charset="0"/>
                 <a:ea typeface="Arial" pitchFamily="34" charset="-122"/>
@@ -3609,7 +3609,7 @@
             <a:r>
               <a:rPr lang="en-US" sz="1100" dirty="0">
                 <a:solidFill>
-                  <a:srgbClr val="2C3E50"/>
+                  <a:srgbClr val="263238"/>
                 </a:solidFill>
                 <a:latin typeface="Arial" pitchFamily="34" charset="0"/>
                 <a:ea typeface="Arial" pitchFamily="34" charset="-122"/>
@@ -3633,7 +3633,7 @@
             <a:r>
               <a:rPr lang="en-US" sz="1100" b="1" dirty="0">
                 <a:solidFill>
-                  <a:srgbClr val="2196F3"/>
+                  <a:srgbClr val="26C6DA"/>
                 </a:solidFill>
                 <a:latin typeface="Arial" pitchFamily="34" charset="0"/>
                 <a:ea typeface="Arial" pitchFamily="34" charset="-122"/>
@@ -3653,7 +3653,7 @@
             <a:r>
               <a:rPr lang="en-US" sz="1100" dirty="0">
                 <a:solidFill>
-                  <a:srgbClr val="2C3E50"/>
+                  <a:srgbClr val="263238"/>
                 </a:solidFill>
                 <a:latin typeface="Arial" pitchFamily="34" charset="0"/>
                 <a:ea typeface="Arial" pitchFamily="34" charset="-122"/>
@@ -3677,7 +3677,7 @@
             <a:r>
               <a:rPr lang="en-US" sz="1100" dirty="0">
                 <a:solidFill>
-                  <a:srgbClr val="2C3E50"/>
+                  <a:srgbClr val="263238"/>
                 </a:solidFill>
                 <a:latin typeface="Arial" pitchFamily="34" charset="0"/>
                 <a:ea typeface="Arial" pitchFamily="34" charset="-122"/>
@@ -3697,7 +3697,7 @@
             <a:r>
               <a:rPr lang="en-US" sz="1100" dirty="0">
                 <a:solidFill>
-                  <a:srgbClr val="FF6B35"/>
+                  <a:srgbClr val="5E35B1"/>
                 </a:solidFill>
                 <a:latin typeface="Arial" pitchFamily="34" charset="0"/>
                 <a:ea typeface="Arial" pitchFamily="34" charset="-122"/>
@@ -3721,7 +3721,7 @@
             <a:r>
               <a:rPr lang="en-US" sz="1100" b="1" dirty="0">
                 <a:solidFill>
-                  <a:srgbClr val="2196F3"/>
+                  <a:srgbClr val="26C6DA"/>
                 </a:solidFill>
                 <a:latin typeface="Arial" pitchFamily="34" charset="0"/>
                 <a:ea typeface="Arial" pitchFamily="34" charset="-122"/>
@@ -3741,7 +3741,7 @@
             <a:r>
               <a:rPr lang="en-US" sz="1100" dirty="0">
                 <a:solidFill>
-                  <a:srgbClr val="2C3E50"/>
+                  <a:srgbClr val="263238"/>
                 </a:solidFill>
                 <a:latin typeface="Arial" pitchFamily="34" charset="0"/>
                 <a:ea typeface="Arial" pitchFamily="34" charset="-122"/>
@@ -3787,7 +3787,7 @@
             <a:r>
               <a:rPr lang="en-US" sz="1100" dirty="0">
                 <a:solidFill>
-                  <a:srgbClr val="2C3E50"/>
+                  <a:srgbClr val="263238"/>
                 </a:solidFill>
                 <a:latin typeface="Arial" pitchFamily="34" charset="0"/>
                 <a:ea typeface="Arial" pitchFamily="34" charset="-122"/>
@@ -3833,7 +3833,7 @@
             <a:r>
               <a:rPr lang="en-US" sz="1100" dirty="0">
                 <a:solidFill>
-                  <a:srgbClr val="2C3E50"/>
+                  <a:srgbClr val="263238"/>
                 </a:solidFill>
                 <a:latin typeface="Arial" pitchFamily="34" charset="0"/>
                 <a:ea typeface="Arial" pitchFamily="34" charset="-122"/>
@@ -3853,7 +3853,7 @@
             <a:r>
               <a:rPr lang="en-US" sz="1100" dirty="0">
                 <a:solidFill>
-                  <a:srgbClr val="FF6B35"/>
+                  <a:srgbClr val="5E35B1"/>
                 </a:solidFill>
                 <a:latin typeface="Arial" pitchFamily="34" charset="0"/>
                 <a:ea typeface="Arial" pitchFamily="34" charset="-122"/>
@@ -3912,7 +3912,7 @@
             <a:avLst/>
           </a:prstGeom>
           <a:solidFill>
-            <a:srgbClr val="181B24"/>
+            <a:srgbClr val="1A237E"/>
           </a:solidFill>
           <a:ln/>
         </p:spPr>
@@ -3999,7 +3999,7 @@
             <a:r>
               <a:rPr lang="en-US" sz="1200" b="1" dirty="0">
                 <a:solidFill>
-                  <a:srgbClr val="2C3E50"/>
+                  <a:srgbClr val="263238"/>
                 </a:solidFill>
                 <a:latin typeface="Arial" pitchFamily="34" charset="0"/>
                 <a:ea typeface="Arial" pitchFamily="34" charset="-122"/>
@@ -4045,7 +4045,7 @@
             <a:r>
               <a:rPr lang="en-US" sz="1200" b="1" dirty="0">
                 <a:solidFill>
-                  <a:srgbClr val="2196F3"/>
+                  <a:srgbClr val="26C6DA"/>
                 </a:solidFill>
                 <a:latin typeface="Arial" pitchFamily="34" charset="0"/>
                 <a:ea typeface="Arial" pitchFamily="34" charset="-122"/>
@@ -4065,7 +4065,7 @@
             <a:r>
               <a:rPr lang="en-US" sz="1200" dirty="0">
                 <a:solidFill>
-                  <a:srgbClr val="2C3E50"/>
+                  <a:srgbClr val="263238"/>
                 </a:solidFill>
                 <a:latin typeface="Arial" pitchFamily="34" charset="0"/>
                 <a:ea typeface="Arial" pitchFamily="34" charset="-122"/>
@@ -4085,7 +4085,7 @@
             <a:r>
               <a:rPr lang="en-US" sz="1200" dirty="0">
                 <a:solidFill>
-                  <a:srgbClr val="FF6B35"/>
+                  <a:srgbClr val="5E35B1"/>
                 </a:solidFill>
                 <a:latin typeface="Arial" pitchFamily="34" charset="0"/>
                 <a:ea typeface="Arial" pitchFamily="34" charset="-122"/>
@@ -4105,7 +4105,7 @@
             <a:r>
               <a:rPr lang="en-US" sz="1200" dirty="0">
                 <a:solidFill>
-                  <a:srgbClr val="2C3E50"/>
+                  <a:srgbClr val="263238"/>
                 </a:solidFill>
                 <a:latin typeface="Arial" pitchFamily="34" charset="0"/>
                 <a:ea typeface="Arial" pitchFamily="34" charset="-122"/>
@@ -4129,7 +4129,7 @@
             <a:r>
               <a:rPr lang="en-US" sz="1000" dirty="0">
                 <a:solidFill>
-                  <a:srgbClr val="FF6B35"/>
+                  <a:srgbClr val="5E35B1"/>
                 </a:solidFill>
                 <a:latin typeface="Arial" pitchFamily="34" charset="0"/>
                 <a:ea typeface="Arial" pitchFamily="34" charset="-122"/>
@@ -4149,7 +4149,7 @@
             <a:r>
               <a:rPr lang="en-US" sz="1200" dirty="0">
                 <a:solidFill>
-                  <a:srgbClr val="2C3E50"/>
+                  <a:srgbClr val="263238"/>
                 </a:solidFill>
                 <a:latin typeface="Arial" pitchFamily="34" charset="0"/>
                 <a:ea typeface="Arial" pitchFamily="34" charset="-122"/>
@@ -4173,7 +4173,7 @@
             <a:r>
               <a:rPr lang="en-US" sz="1000" dirty="0">
                 <a:solidFill>
-                  <a:srgbClr val="FF6B35"/>
+                  <a:srgbClr val="5E35B1"/>
                 </a:solidFill>
                 <a:latin typeface="Arial" pitchFamily="34" charset="0"/>
                 <a:ea typeface="Arial" pitchFamily="34" charset="-122"/>
@@ -4193,7 +4193,7 @@
             <a:r>
               <a:rPr lang="en-US" sz="1200" dirty="0">
                 <a:solidFill>
-                  <a:srgbClr val="2C3E50"/>
+                  <a:srgbClr val="263238"/>
                 </a:solidFill>
                 <a:latin typeface="Arial" pitchFamily="34" charset="0"/>
                 <a:ea typeface="Arial" pitchFamily="34" charset="-122"/>
@@ -4217,7 +4217,7 @@
             <a:r>
               <a:rPr lang="en-US" sz="1000" dirty="0">
                 <a:solidFill>
-                  <a:srgbClr val="FF6B35"/>
+                  <a:srgbClr val="5E35B1"/>
                 </a:solidFill>
                 <a:latin typeface="Arial" pitchFamily="34" charset="0"/>
                 <a:ea typeface="Arial" pitchFamily="34" charset="-122"/>
@@ -4237,7 +4237,7 @@
             <a:r>
               <a:rPr lang="en-US" sz="1200" dirty="0">
                 <a:solidFill>
-                  <a:srgbClr val="2C3E50"/>
+                  <a:srgbClr val="263238"/>
                 </a:solidFill>
                 <a:latin typeface="Arial" pitchFamily="34" charset="0"/>
                 <a:ea typeface="Arial" pitchFamily="34" charset="-122"/>
@@ -4261,7 +4261,7 @@
             <a:r>
               <a:rPr lang="en-US" sz="1000" dirty="0">
                 <a:solidFill>
-                  <a:srgbClr val="FF6B35"/>
+                  <a:srgbClr val="5E35B1"/>
                 </a:solidFill>
                 <a:latin typeface="Arial" pitchFamily="34" charset="0"/>
                 <a:ea typeface="Arial" pitchFamily="34" charset="-122"/>
@@ -4281,7 +4281,7 @@
             <a:r>
               <a:rPr lang="en-US" sz="1200" dirty="0">
                 <a:solidFill>
-                  <a:srgbClr val="2C3E50"/>
+                  <a:srgbClr val="263238"/>
                 </a:solidFill>
                 <a:latin typeface="Arial" pitchFamily="34" charset="0"/>
                 <a:ea typeface="Arial" pitchFamily="34" charset="-122"/>
@@ -4327,7 +4327,7 @@
             <a:r>
               <a:rPr lang="en-US" sz="1000" dirty="0">
                 <a:solidFill>
-                  <a:srgbClr val="FF6B35"/>
+                  <a:srgbClr val="5E35B1"/>
                 </a:solidFill>
                 <a:latin typeface="Arial" pitchFamily="34" charset="0"/>
                 <a:ea typeface="Arial" pitchFamily="34" charset="-122"/>
@@ -4347,7 +4347,7 @@
             <a:r>
               <a:rPr lang="en-US" sz="1000" dirty="0">
                 <a:solidFill>
-                  <a:srgbClr val="2C3E50"/>
+                  <a:srgbClr val="263238"/>
                 </a:solidFill>
                 <a:latin typeface="Arial" pitchFamily="34" charset="0"/>
                 <a:ea typeface="Arial" pitchFamily="34" charset="-122"/>
@@ -4371,7 +4371,7 @@
             <a:r>
               <a:rPr lang="en-US" sz="1000" dirty="0">
                 <a:solidFill>
-                  <a:srgbClr val="FF6B35"/>
+                  <a:srgbClr val="5E35B1"/>
                 </a:solidFill>
                 <a:latin typeface="Arial" pitchFamily="34" charset="0"/>
                 <a:ea typeface="Arial" pitchFamily="34" charset="-122"/>
@@ -4391,7 +4391,7 @@
             <a:r>
               <a:rPr lang="en-US" sz="1000" dirty="0">
                 <a:solidFill>
-                  <a:srgbClr val="2C3E50"/>
+                  <a:srgbClr val="263238"/>
                 </a:solidFill>
                 <a:latin typeface="Arial" pitchFamily="34" charset="0"/>
                 <a:ea typeface="Arial" pitchFamily="34" charset="-122"/>
@@ -4415,7 +4415,7 @@
             <a:r>
               <a:rPr lang="en-US" sz="1000" dirty="0">
                 <a:solidFill>
-                  <a:srgbClr val="FF6B35"/>
+                  <a:srgbClr val="5E35B1"/>
                 </a:solidFill>
                 <a:latin typeface="Arial" pitchFamily="34" charset="0"/>
                 <a:ea typeface="Arial" pitchFamily="34" charset="-122"/>
@@ -4435,7 +4435,7 @@
             <a:r>
               <a:rPr lang="en-US" sz="1000" dirty="0">
                 <a:solidFill>
-                  <a:srgbClr val="2C3E50"/>
+                  <a:srgbClr val="263238"/>
                 </a:solidFill>
                 <a:latin typeface="Arial" pitchFamily="34" charset="0"/>
                 <a:ea typeface="Arial" pitchFamily="34" charset="-122"/>
@@ -4459,7 +4459,7 @@
             <a:r>
               <a:rPr lang="en-US" sz="1000" dirty="0">
                 <a:solidFill>
-                  <a:srgbClr val="FF6B35"/>
+                  <a:srgbClr val="5E35B1"/>
                 </a:solidFill>
                 <a:latin typeface="Arial" pitchFamily="34" charset="0"/>
                 <a:ea typeface="Arial" pitchFamily="34" charset="-122"/>
@@ -4479,7 +4479,7 @@
             <a:r>
               <a:rPr lang="en-US" sz="1000" dirty="0">
                 <a:solidFill>
-                  <a:srgbClr val="2C3E50"/>
+                  <a:srgbClr val="263238"/>
                 </a:solidFill>
                 <a:latin typeface="Arial" pitchFamily="34" charset="0"/>
                 <a:ea typeface="Arial" pitchFamily="34" charset="-122"/>
@@ -4540,7 +4540,7 @@
           <a:noFill/>
           <a:ln w="47625">
             <a:solidFill>
-              <a:srgbClr val="FF6B35"/>
+              <a:srgbClr val="5E35B1"/>
             </a:solidFill>
             <a:prstDash val="solid"/>
           </a:ln>
@@ -4579,7 +4579,7 @@
             <a:r>
               <a:rPr lang="en-US" sz="1100" b="1" dirty="0">
                 <a:solidFill>
-                  <a:srgbClr val="2C3E50"/>
+                  <a:srgbClr val="263238"/>
                 </a:solidFill>
                 <a:latin typeface="Arial" pitchFamily="34" charset="0"/>
                 <a:ea typeface="Arial" pitchFamily="34" charset="-122"/>
@@ -4625,7 +4625,7 @@
             <a:r>
               <a:rPr lang="en-US" sz="1000" dirty="0">
                 <a:solidFill>
-                  <a:srgbClr val="2C3E50"/>
+                  <a:srgbClr val="263238"/>
                 </a:solidFill>
                 <a:latin typeface="Arial" pitchFamily="34" charset="0"/>
                 <a:ea typeface="Arial" pitchFamily="34" charset="-122"/>
@@ -4649,7 +4649,7 @@
             <a:r>
               <a:rPr lang="en-US" sz="1000" dirty="0">
                 <a:solidFill>
-                  <a:srgbClr val="2C3E50"/>
+                  <a:srgbClr val="263238"/>
                 </a:solidFill>
                 <a:latin typeface="Arial" pitchFamily="34" charset="0"/>
                 <a:ea typeface="Arial" pitchFamily="34" charset="-122"/>
@@ -4673,7 +4673,7 @@
             <a:r>
               <a:rPr lang="en-US" sz="1000" dirty="0">
                 <a:solidFill>
-                  <a:srgbClr val="2C3E50"/>
+                  <a:srgbClr val="263238"/>
                 </a:solidFill>
                 <a:latin typeface="Arial" pitchFamily="34" charset="0"/>
                 <a:ea typeface="Arial" pitchFamily="34" charset="-122"/>
@@ -4732,7 +4732,7 @@
             <a:avLst/>
           </a:prstGeom>
           <a:solidFill>
-            <a:srgbClr val="181B24"/>
+            <a:srgbClr val="1A237E"/>
           </a:solidFill>
           <a:ln/>
         </p:spPr>
@@ -4816,7 +4816,7 @@
             <a:r>
               <a:rPr lang="en-US" sz="1400" b="1" dirty="0">
                 <a:solidFill>
-                  <a:srgbClr val="2196F3"/>
+                  <a:srgbClr val="26C6DA"/>
                 </a:solidFill>
                 <a:latin typeface="Arial" pitchFamily="34" charset="0"/>
                 <a:ea typeface="Arial" pitchFamily="34" charset="-122"/>
@@ -4861,7 +4861,7 @@
             <a:r>
               <a:rPr lang="en-US" sz="1100" b="1" dirty="0">
                 <a:solidFill>
-                  <a:srgbClr val="2C3E50"/>
+                  <a:srgbClr val="263238"/>
                 </a:solidFill>
                 <a:latin typeface="Arial" pitchFamily="34" charset="0"/>
                 <a:ea typeface="Arial" pitchFamily="34" charset="-122"/>
@@ -4881,7 +4881,7 @@
             <a:r>
               <a:rPr lang="en-US" sz="1100" dirty="0">
                 <a:solidFill>
-                  <a:srgbClr val="2C3E50"/>
+                  <a:srgbClr val="263238"/>
                 </a:solidFill>
                 <a:latin typeface="Arial" pitchFamily="34" charset="0"/>
                 <a:ea typeface="Arial" pitchFamily="34" charset="-122"/>
@@ -5020,7 +5020,7 @@
             <a:r>
               <a:rPr lang="en-US" sz="1100" b="1" dirty="0">
                 <a:solidFill>
-                  <a:srgbClr val="2C3E50"/>
+                  <a:srgbClr val="263238"/>
                 </a:solidFill>
                 <a:latin typeface="Arial" pitchFamily="34" charset="0"/>
                 <a:ea typeface="Arial" pitchFamily="34" charset="-122"/>
@@ -5040,7 +5040,7 @@
             <a:r>
               <a:rPr lang="en-US" sz="1100" dirty="0">
                 <a:solidFill>
-                  <a:srgbClr val="2C3E50"/>
+                  <a:srgbClr val="263238"/>
                 </a:solidFill>
                 <a:latin typeface="Arial" pitchFamily="34" charset="0"/>
                 <a:ea typeface="Arial" pitchFamily="34" charset="-122"/>
@@ -5085,7 +5085,7 @@
             <a:r>
               <a:rPr lang="en-US" sz="1400" b="1" dirty="0">
                 <a:solidFill>
-                  <a:srgbClr val="2196F3"/>
+                  <a:srgbClr val="26C6DA"/>
                 </a:solidFill>
                 <a:latin typeface="Arial" pitchFamily="34" charset="0"/>
                 <a:ea typeface="Arial" pitchFamily="34" charset="-122"/>
@@ -5131,7 +5131,7 @@
             <a:r>
               <a:rPr lang="en-US" sz="1100" dirty="0">
                 <a:solidFill>
-                  <a:srgbClr val="2C3E50"/>
+                  <a:srgbClr val="263238"/>
                 </a:solidFill>
                 <a:latin typeface="Arial" pitchFamily="34" charset="0"/>
                 <a:ea typeface="Arial" pitchFamily="34" charset="-122"/>
@@ -5155,7 +5155,7 @@
             <a:r>
               <a:rPr lang="en-US" sz="1100" dirty="0">
                 <a:solidFill>
-                  <a:srgbClr val="2C3E50"/>
+                  <a:srgbClr val="263238"/>
                 </a:solidFill>
                 <a:latin typeface="Arial" pitchFamily="34" charset="0"/>
                 <a:ea typeface="Arial" pitchFamily="34" charset="-122"/>
@@ -5179,7 +5179,7 @@
             <a:r>
               <a:rPr lang="en-US" sz="1100" dirty="0">
                 <a:solidFill>
-                  <a:srgbClr val="2C3E50"/>
+                  <a:srgbClr val="263238"/>
                 </a:solidFill>
                 <a:latin typeface="Arial" pitchFamily="34" charset="0"/>
                 <a:ea typeface="Arial" pitchFamily="34" charset="-122"/>
@@ -5238,7 +5238,7 @@
             <a:avLst/>
           </a:prstGeom>
           <a:solidFill>
-            <a:srgbClr val="181B24"/>
+            <a:srgbClr val="1A237E"/>
           </a:solidFill>
           <a:ln/>
         </p:spPr>
@@ -5326,7 +5326,7 @@
             <a:r>
               <a:rPr lang="en-US" sz="1300" dirty="0">
                 <a:solidFill>
-                  <a:srgbClr val="2C3E50"/>
+                  <a:srgbClr val="263238"/>
                 </a:solidFill>
                 <a:latin typeface="Arial" pitchFamily="34" charset="0"/>
                 <a:ea typeface="Arial" pitchFamily="34" charset="-122"/>
@@ -5350,7 +5350,7 @@
             <a:r>
               <a:rPr lang="en-US" sz="1300" dirty="0">
                 <a:solidFill>
-                  <a:srgbClr val="2C3E50"/>
+                  <a:srgbClr val="263238"/>
                 </a:solidFill>
                 <a:latin typeface="Arial" pitchFamily="34" charset="0"/>
                 <a:ea typeface="Arial" pitchFamily="34" charset="-122"/>
@@ -5374,7 +5374,7 @@
             <a:r>
               <a:rPr lang="en-US" sz="1300" dirty="0">
                 <a:solidFill>
-                  <a:srgbClr val="2C3E50"/>
+                  <a:srgbClr val="263238"/>
                 </a:solidFill>
                 <a:latin typeface="Arial" pitchFamily="34" charset="0"/>
                 <a:ea typeface="Arial" pitchFamily="34" charset="-122"/>
@@ -5398,7 +5398,7 @@
             <a:r>
               <a:rPr lang="en-US" sz="1300" dirty="0">
                 <a:solidFill>
-                  <a:srgbClr val="2C3E50"/>
+                  <a:srgbClr val="263238"/>
                 </a:solidFill>
                 <a:latin typeface="Arial" pitchFamily="34" charset="0"/>
                 <a:ea typeface="Arial" pitchFamily="34" charset="-122"/>
@@ -5422,7 +5422,7 @@
             <a:r>
               <a:rPr lang="en-US" sz="1300" dirty="0">
                 <a:solidFill>
-                  <a:srgbClr val="2C3E50"/>
+                  <a:srgbClr val="263238"/>
                 </a:solidFill>
                 <a:latin typeface="Arial" pitchFamily="34" charset="0"/>
                 <a:ea typeface="Arial" pitchFamily="34" charset="-122"/>
@@ -5446,7 +5446,7 @@
             <a:r>
               <a:rPr lang="en-US" sz="1300" dirty="0">
                 <a:solidFill>
-                  <a:srgbClr val="2C3E50"/>
+                  <a:srgbClr val="263238"/>
                 </a:solidFill>
                 <a:latin typeface="Arial" pitchFamily="34" charset="0"/>
                 <a:ea typeface="Arial" pitchFamily="34" charset="-122"/>
@@ -5470,7 +5470,7 @@
             <a:r>
               <a:rPr lang="en-US" sz="1300" dirty="0">
                 <a:solidFill>
-                  <a:srgbClr val="2C3E50"/>
+                  <a:srgbClr val="263238"/>
                 </a:solidFill>
                 <a:latin typeface="Arial" pitchFamily="34" charset="0"/>
                 <a:ea typeface="Arial" pitchFamily="34" charset="-122"/>
@@ -5494,7 +5494,7 @@
             <a:r>
               <a:rPr lang="en-US" sz="1300" dirty="0">
                 <a:solidFill>
-                  <a:srgbClr val="2C3E50"/>
+                  <a:srgbClr val="263238"/>
                 </a:solidFill>
                 <a:latin typeface="Arial" pitchFamily="34" charset="0"/>
                 <a:ea typeface="Arial" pitchFamily="34" charset="-122"/>
@@ -5518,7 +5518,7 @@
             <a:r>
               <a:rPr lang="en-US" sz="1300" dirty="0">
                 <a:solidFill>
-                  <a:srgbClr val="2C3E50"/>
+                  <a:srgbClr val="263238"/>
                 </a:solidFill>
                 <a:latin typeface="Arial" pitchFamily="34" charset="0"/>
                 <a:ea typeface="Arial" pitchFamily="34" charset="-122"/>
@@ -5577,7 +5577,7 @@
             <a:avLst/>
           </a:prstGeom>
           <a:solidFill>
-            <a:srgbClr val="181B24"/>
+            <a:srgbClr val="1A237E"/>
           </a:solidFill>
           <a:ln/>
         </p:spPr>
@@ -5665,7 +5665,7 @@
             <a:r>
               <a:rPr lang="en-US" sz="1400" b="1" dirty="0">
                 <a:solidFill>
-                  <a:srgbClr val="2C3E50"/>
+                  <a:srgbClr val="263238"/>
                 </a:solidFill>
                 <a:latin typeface="Arial" pitchFamily="34" charset="0"/>
                 <a:ea typeface="Arial" pitchFamily="34" charset="-122"/>
@@ -5685,7 +5685,7 @@
             <a:r>
               <a:rPr lang="en-US" sz="1400" dirty="0">
                 <a:solidFill>
-                  <a:srgbClr val="2C3E50"/>
+                  <a:srgbClr val="263238"/>
                 </a:solidFill>
                 <a:latin typeface="Arial" pitchFamily="34" charset="0"/>
                 <a:ea typeface="Arial" pitchFamily="34" charset="-122"/>
@@ -5709,7 +5709,7 @@
             <a:r>
               <a:rPr lang="en-US" sz="1400" dirty="0">
                 <a:solidFill>
-                  <a:srgbClr val="2C3E50"/>
+                  <a:srgbClr val="263238"/>
                 </a:solidFill>
                 <a:latin typeface="Arial" pitchFamily="34" charset="0"/>
                 <a:ea typeface="Arial" pitchFamily="34" charset="-122"/>
@@ -5733,7 +5733,7 @@
             <a:r>
               <a:rPr lang="en-US" sz="1400" dirty="0">
                 <a:solidFill>
-                  <a:srgbClr val="2C3E50"/>
+                  <a:srgbClr val="263238"/>
                 </a:solidFill>
                 <a:latin typeface="Arial" pitchFamily="34" charset="0"/>
                 <a:ea typeface="Arial" pitchFamily="34" charset="-122"/>
@@ -5757,7 +5757,7 @@
             <a:r>
               <a:rPr lang="en-US" sz="1400" dirty="0">
                 <a:solidFill>
-                  <a:srgbClr val="2C3E50"/>
+                  <a:srgbClr val="263238"/>
                 </a:solidFill>
                 <a:latin typeface="Arial" pitchFamily="34" charset="0"/>
                 <a:ea typeface="Arial" pitchFamily="34" charset="-122"/>
@@ -5777,7 +5777,7 @@
             <a:r>
               <a:rPr lang="en-US" sz="1400" b="1" dirty="0">
                 <a:solidFill>
-                  <a:srgbClr val="2196F3"/>
+                  <a:srgbClr val="26C6DA"/>
                 </a:solidFill>
                 <a:latin typeface="Arial" pitchFamily="34" charset="0"/>
                 <a:ea typeface="Arial" pitchFamily="34" charset="-122"/>
@@ -5797,7 +5797,7 @@
             <a:r>
               <a:rPr lang="en-US" sz="1400" dirty="0">
                 <a:solidFill>
-                  <a:srgbClr val="2C3E50"/>
+                  <a:srgbClr val="263238"/>
                 </a:solidFill>
                 <a:latin typeface="Arial" pitchFamily="34" charset="0"/>
                 <a:ea typeface="Arial" pitchFamily="34" charset="-122"/>
@@ -5821,7 +5821,7 @@
             <a:r>
               <a:rPr lang="en-US" sz="1400" b="1" dirty="0">
                 <a:solidFill>
-                  <a:srgbClr val="2196F3"/>
+                  <a:srgbClr val="26C6DA"/>
                 </a:solidFill>
                 <a:latin typeface="Arial" pitchFamily="34" charset="0"/>
                 <a:ea typeface="Arial" pitchFamily="34" charset="-122"/>
@@ -5841,7 +5841,7 @@
             <a:r>
               <a:rPr lang="en-US" sz="1400" dirty="0">
                 <a:solidFill>
-                  <a:srgbClr val="2C3E50"/>
+                  <a:srgbClr val="263238"/>
                 </a:solidFill>
                 <a:latin typeface="Arial" pitchFamily="34" charset="0"/>
                 <a:ea typeface="Arial" pitchFamily="34" charset="-122"/>
@@ -5865,7 +5865,7 @@
             <a:r>
               <a:rPr lang="en-US" sz="1400" b="1" dirty="0">
                 <a:solidFill>
-                  <a:srgbClr val="2196F3"/>
+                  <a:srgbClr val="26C6DA"/>
                 </a:solidFill>
                 <a:latin typeface="Arial" pitchFamily="34" charset="0"/>
                 <a:ea typeface="Arial" pitchFamily="34" charset="-122"/>
@@ -5885,7 +5885,7 @@
             <a:r>
               <a:rPr lang="en-US" sz="1400" dirty="0">
                 <a:solidFill>
-                  <a:srgbClr val="2C3E50"/>
+                  <a:srgbClr val="263238"/>
                 </a:solidFill>
                 <a:latin typeface="Arial" pitchFamily="34" charset="0"/>
                 <a:ea typeface="Arial" pitchFamily="34" charset="-122"/>
@@ -5931,7 +5931,7 @@
             <a:r>
               <a:rPr lang="en-US" sz="1400" dirty="0">
                 <a:solidFill>
-                  <a:srgbClr val="2C3E50"/>
+                  <a:srgbClr val="263238"/>
                 </a:solidFill>
                 <a:latin typeface="Arial" pitchFamily="34" charset="0"/>
                 <a:ea typeface="Arial" pitchFamily="34" charset="-122"/>
@@ -5955,7 +5955,7 @@
             <a:r>
               <a:rPr lang="en-US" sz="1400" dirty="0">
                 <a:solidFill>
-                  <a:srgbClr val="2C3E50"/>
+                  <a:srgbClr val="263238"/>
                 </a:solidFill>
                 <a:latin typeface="Arial" pitchFamily="34" charset="0"/>
                 <a:ea typeface="Arial" pitchFamily="34" charset="-122"/>
@@ -6014,7 +6014,7 @@
             <a:avLst/>
           </a:prstGeom>
           <a:solidFill>
-            <a:srgbClr val="181B24"/>
+            <a:srgbClr val="1A237E"/>
           </a:solidFill>
           <a:ln/>
         </p:spPr>
@@ -6098,7 +6098,7 @@
             <a:r>
               <a:rPr lang="en-US" sz="1800" b="1" dirty="0">
                 <a:solidFill>
-                  <a:srgbClr val="2196F3"/>
+                  <a:srgbClr val="26C6DA"/>
                 </a:solidFill>
                 <a:latin typeface="Arial" pitchFamily="34" charset="0"/>
                 <a:ea typeface="Arial" pitchFamily="34" charset="-122"/>
@@ -6143,7 +6143,7 @@
             <a:r>
               <a:rPr lang="en-US" sz="1300" dirty="0">
                 <a:solidFill>
-                  <a:srgbClr val="2C3E50"/>
+                  <a:srgbClr val="263238"/>
                 </a:solidFill>
                 <a:latin typeface="Arial" pitchFamily="34" charset="0"/>
                 <a:ea typeface="Arial" pitchFamily="34" charset="-122"/>
@@ -6185,7 +6185,7 @@
             <a:r>
               <a:rPr lang="en-US" sz="1800" b="1" dirty="0">
                 <a:solidFill>
-                  <a:srgbClr val="2196F3"/>
+                  <a:srgbClr val="26C6DA"/>
                 </a:solidFill>
                 <a:latin typeface="Arial" pitchFamily="34" charset="0"/>
                 <a:ea typeface="Arial" pitchFamily="34" charset="-122"/>
@@ -6230,7 +6230,7 @@
             <a:r>
               <a:rPr lang="en-US" sz="1300" dirty="0">
                 <a:solidFill>
-                  <a:srgbClr val="2C3E50"/>
+                  <a:srgbClr val="263238"/>
                 </a:solidFill>
                 <a:latin typeface="Arial" pitchFamily="34" charset="0"/>
                 <a:ea typeface="Arial" pitchFamily="34" charset="-122"/>
@@ -6291,7 +6291,7 @@
           <a:noFill/>
           <a:ln w="47625">
             <a:solidFill>
-              <a:srgbClr val="FF6B35"/>
+              <a:srgbClr val="5E35B1"/>
             </a:solidFill>
             <a:prstDash val="solid"/>
           </a:ln>
@@ -6327,7 +6327,7 @@
             <a:r>
               <a:rPr lang="en-US" sz="1300" b="1" dirty="0">
                 <a:solidFill>
-                  <a:srgbClr val="181B24"/>
+                  <a:srgbClr val="1A237E"/>
                 </a:solidFill>
                 <a:latin typeface="Arial" pitchFamily="34" charset="0"/>
                 <a:ea typeface="Arial" pitchFamily="34" charset="-122"/>
@@ -6370,7 +6370,7 @@
             <a:r>
               <a:rPr lang="en-US" sz="1300" dirty="0">
                 <a:solidFill>
-                  <a:srgbClr val="2C3E50"/>
+                  <a:srgbClr val="263238"/>
                 </a:solidFill>
                 <a:latin typeface="Arial" pitchFamily="34" charset="0"/>
                 <a:ea typeface="Arial" pitchFamily="34" charset="-122"/>
@@ -6391,7 +6391,7 @@
             <a:r>
               <a:rPr lang="en-US" sz="1300" dirty="0">
                 <a:solidFill>
-                  <a:srgbClr val="2C3E50"/>
+                  <a:srgbClr val="263238"/>
                 </a:solidFill>
                 <a:latin typeface="Arial" pitchFamily="34" charset="0"/>
                 <a:ea typeface="Arial" pitchFamily="34" charset="-122"/>
@@ -6412,7 +6412,7 @@
             <a:r>
               <a:rPr lang="en-US" sz="1300" dirty="0">
                 <a:solidFill>
-                  <a:srgbClr val="2C3E50"/>
+                  <a:srgbClr val="263238"/>
                 </a:solidFill>
                 <a:latin typeface="Arial" pitchFamily="34" charset="0"/>
                 <a:ea typeface="Arial" pitchFamily="34" charset="-122"/>
@@ -6471,7 +6471,7 @@
             <a:avLst/>
           </a:prstGeom>
           <a:solidFill>
-            <a:srgbClr val="181B24"/>
+            <a:srgbClr val="1A237E"/>
           </a:solidFill>
           <a:ln/>
         </p:spPr>
@@ -6558,7 +6558,7 @@
             <a:r>
               <a:rPr lang="en-US" sz="1400" b="1" dirty="0">
                 <a:solidFill>
-                  <a:srgbClr val="2C3E50"/>
+                  <a:srgbClr val="263238"/>
                 </a:solidFill>
                 <a:latin typeface="Arial" pitchFamily="34" charset="0"/>
                 <a:ea typeface="Arial" pitchFamily="34" charset="-122"/>
@@ -6604,7 +6604,7 @@
             <a:r>
               <a:rPr lang="en-US" sz="1300" b="1" dirty="0">
                 <a:solidFill>
-                  <a:srgbClr val="2196F3"/>
+                  <a:srgbClr val="26C6DA"/>
                 </a:solidFill>
                 <a:latin typeface="Arial" pitchFamily="34" charset="0"/>
                 <a:ea typeface="Arial" pitchFamily="34" charset="-122"/>
@@ -6624,7 +6624,7 @@
             <a:r>
               <a:rPr lang="en-US" sz="1300" dirty="0">
                 <a:solidFill>
-                  <a:srgbClr val="2C3E50"/>
+                  <a:srgbClr val="263238"/>
                 </a:solidFill>
                 <a:latin typeface="Arial" pitchFamily="34" charset="0"/>
                 <a:ea typeface="Arial" pitchFamily="34" charset="-122"/>
@@ -6648,7 +6648,7 @@
             <a:r>
               <a:rPr lang="en-US" sz="1300" b="1" dirty="0">
                 <a:solidFill>
-                  <a:srgbClr val="2196F3"/>
+                  <a:srgbClr val="26C6DA"/>
                 </a:solidFill>
                 <a:latin typeface="Arial" pitchFamily="34" charset="0"/>
                 <a:ea typeface="Arial" pitchFamily="34" charset="-122"/>
@@ -6668,7 +6668,7 @@
             <a:r>
               <a:rPr lang="en-US" sz="1300" dirty="0">
                 <a:solidFill>
-                  <a:srgbClr val="2C3E50"/>
+                  <a:srgbClr val="263238"/>
                 </a:solidFill>
                 <a:latin typeface="Arial" pitchFamily="34" charset="0"/>
                 <a:ea typeface="Arial" pitchFamily="34" charset="-122"/>
@@ -6692,7 +6692,7 @@
             <a:r>
               <a:rPr lang="en-US" sz="1300" b="1" dirty="0">
                 <a:solidFill>
-                  <a:srgbClr val="2196F3"/>
+                  <a:srgbClr val="26C6DA"/>
                 </a:solidFill>
                 <a:latin typeface="Arial" pitchFamily="34" charset="0"/>
                 <a:ea typeface="Arial" pitchFamily="34" charset="-122"/>
@@ -6712,7 +6712,7 @@
             <a:r>
               <a:rPr lang="en-US" sz="1300" dirty="0">
                 <a:solidFill>
-                  <a:srgbClr val="2C3E50"/>
+                  <a:srgbClr val="263238"/>
                 </a:solidFill>
                 <a:latin typeface="Arial" pitchFamily="34" charset="0"/>
                 <a:ea typeface="Arial" pitchFamily="34" charset="-122"/>
@@ -6736,7 +6736,7 @@
             <a:r>
               <a:rPr lang="en-US" sz="1300" b="1" dirty="0">
                 <a:solidFill>
-                  <a:srgbClr val="2196F3"/>
+                  <a:srgbClr val="26C6DA"/>
                 </a:solidFill>
                 <a:latin typeface="Arial" pitchFamily="34" charset="0"/>
                 <a:ea typeface="Arial" pitchFamily="34" charset="-122"/>
@@ -6756,7 +6756,7 @@
             <a:r>
               <a:rPr lang="en-US" sz="1300" dirty="0">
                 <a:solidFill>
-                  <a:srgbClr val="2C3E50"/>
+                  <a:srgbClr val="263238"/>
                 </a:solidFill>
                 <a:latin typeface="Arial" pitchFamily="34" charset="0"/>
                 <a:ea typeface="Arial" pitchFamily="34" charset="-122"/>
@@ -6780,7 +6780,7 @@
             <a:r>
               <a:rPr lang="en-US" sz="1300" b="1" dirty="0">
                 <a:solidFill>
-                  <a:srgbClr val="2196F3"/>
+                  <a:srgbClr val="26C6DA"/>
                 </a:solidFill>
                 <a:latin typeface="Arial" pitchFamily="34" charset="0"/>
                 <a:ea typeface="Arial" pitchFamily="34" charset="-122"/>
@@ -6800,7 +6800,7 @@
             <a:r>
               <a:rPr lang="en-US" sz="1300" dirty="0">
                 <a:solidFill>
-                  <a:srgbClr val="2C3E50"/>
+                  <a:srgbClr val="263238"/>
                 </a:solidFill>
                 <a:latin typeface="Arial" pitchFamily="34" charset="0"/>
                 <a:ea typeface="Arial" pitchFamily="34" charset="-122"/>
@@ -6824,7 +6824,7 @@
             <a:r>
               <a:rPr lang="en-US" sz="1300" b="1" dirty="0">
                 <a:solidFill>
-                  <a:srgbClr val="2196F3"/>
+                  <a:srgbClr val="26C6DA"/>
                 </a:solidFill>
                 <a:latin typeface="Arial" pitchFamily="34" charset="0"/>
                 <a:ea typeface="Arial" pitchFamily="34" charset="-122"/>
@@ -6844,7 +6844,7 @@
             <a:r>
               <a:rPr lang="en-US" sz="1300" dirty="0">
                 <a:solidFill>
-                  <a:srgbClr val="2C3E50"/>
+                  <a:srgbClr val="263238"/>
                 </a:solidFill>
                 <a:latin typeface="Arial" pitchFamily="34" charset="0"/>
                 <a:ea typeface="Arial" pitchFamily="34" charset="-122"/>
@@ -6868,7 +6868,7 @@
             <a:r>
               <a:rPr lang="en-US" sz="1300" b="1" dirty="0">
                 <a:solidFill>
-                  <a:srgbClr val="2196F3"/>
+                  <a:srgbClr val="26C6DA"/>
                 </a:solidFill>
                 <a:latin typeface="Arial" pitchFamily="34" charset="0"/>
                 <a:ea typeface="Arial" pitchFamily="34" charset="-122"/>
@@ -6888,7 +6888,7 @@
             <a:r>
               <a:rPr lang="en-US" sz="1300" dirty="0">
                 <a:solidFill>
-                  <a:srgbClr val="2C3E50"/>
+                  <a:srgbClr val="263238"/>
                 </a:solidFill>
                 <a:latin typeface="Arial" pitchFamily="34" charset="0"/>
                 <a:ea typeface="Arial" pitchFamily="34" charset="-122"/>
@@ -6912,7 +6912,7 @@
             <a:r>
               <a:rPr lang="en-US" sz="1300" b="1" dirty="0">
                 <a:solidFill>
-                  <a:srgbClr val="2196F3"/>
+                  <a:srgbClr val="26C6DA"/>
                 </a:solidFill>
                 <a:latin typeface="Arial" pitchFamily="34" charset="0"/>
                 <a:ea typeface="Arial" pitchFamily="34" charset="-122"/>
@@ -6932,7 +6932,7 @@
             <a:r>
               <a:rPr lang="en-US" sz="1300" dirty="0">
                 <a:solidFill>
-                  <a:srgbClr val="2C3E50"/>
+                  <a:srgbClr val="263238"/>
                 </a:solidFill>
                 <a:latin typeface="Arial" pitchFamily="34" charset="0"/>
                 <a:ea typeface="Arial" pitchFamily="34" charset="-122"/>
@@ -6956,7 +6956,7 @@
             <a:r>
               <a:rPr lang="en-US" sz="1300" b="1" dirty="0">
                 <a:solidFill>
-                  <a:srgbClr val="2196F3"/>
+                  <a:srgbClr val="26C6DA"/>
                 </a:solidFill>
                 <a:latin typeface="Arial" pitchFamily="34" charset="0"/>
                 <a:ea typeface="Arial" pitchFamily="34" charset="-122"/>
@@ -6976,7 +6976,7 @@
             <a:r>
               <a:rPr lang="en-US" sz="1300" dirty="0">
                 <a:solidFill>
-                  <a:srgbClr val="2C3E50"/>
+                  <a:srgbClr val="263238"/>
                 </a:solidFill>
                 <a:latin typeface="Arial" pitchFamily="34" charset="0"/>
                 <a:ea typeface="Arial" pitchFamily="34" charset="-122"/>
@@ -7035,7 +7035,7 @@
             <a:avLst/>
           </a:prstGeom>
           <a:solidFill>
-            <a:srgbClr val="181B24"/>
+            <a:srgbClr val="1A237E"/>
           </a:solidFill>
           <a:ln/>
         </p:spPr>
@@ -7122,7 +7122,7 @@
             <a:r>
               <a:rPr lang="en-US" sz="1400" b="1" dirty="0">
                 <a:solidFill>
-                  <a:srgbClr val="2C3E50"/>
+                  <a:srgbClr val="263238"/>
                 </a:solidFill>
                 <a:latin typeface="Arial" pitchFamily="34" charset="0"/>
                 <a:ea typeface="Arial" pitchFamily="34" charset="-122"/>
@@ -7168,7 +7168,7 @@
             <a:r>
               <a:rPr lang="en-US" sz="1300" b="1" dirty="0">
                 <a:solidFill>
-                  <a:srgbClr val="2196F3"/>
+                  <a:srgbClr val="26C6DA"/>
                 </a:solidFill>
                 <a:latin typeface="Arial" pitchFamily="34" charset="0"/>
                 <a:ea typeface="Arial" pitchFamily="34" charset="-122"/>
@@ -7188,7 +7188,7 @@
             <a:r>
               <a:rPr lang="en-US" sz="1300" dirty="0">
                 <a:solidFill>
-                  <a:srgbClr val="2C3E50"/>
+                  <a:srgbClr val="263238"/>
                 </a:solidFill>
                 <a:latin typeface="Arial" pitchFamily="34" charset="0"/>
                 <a:ea typeface="Arial" pitchFamily="34" charset="-122"/>
@@ -7208,7 +7208,7 @@
             <a:r>
               <a:rPr lang="en-US" sz="1300" dirty="0">
                 <a:solidFill>
-                  <a:srgbClr val="FF6B35"/>
+                  <a:srgbClr val="5E35B1"/>
                 </a:solidFill>
                 <a:latin typeface="Arial" pitchFamily="34" charset="0"/>
                 <a:ea typeface="Arial" pitchFamily="34" charset="-122"/>
@@ -7228,7 +7228,7 @@
             <a:r>
               <a:rPr lang="en-US" sz="1300" dirty="0">
                 <a:solidFill>
-                  <a:srgbClr val="2C3E50"/>
+                  <a:srgbClr val="263238"/>
                 </a:solidFill>
                 <a:latin typeface="Arial" pitchFamily="34" charset="0"/>
                 <a:ea typeface="Arial" pitchFamily="34" charset="-122"/>
@@ -7252,7 +7252,7 @@
             <a:r>
               <a:rPr lang="en-US" sz="1300" dirty="0">
                 <a:solidFill>
-                  <a:srgbClr val="2C3E50"/>
+                  <a:srgbClr val="263238"/>
                 </a:solidFill>
                 <a:latin typeface="Arial" pitchFamily="34" charset="0"/>
                 <a:ea typeface="Arial" pitchFamily="34" charset="-122"/>
@@ -7276,7 +7276,7 @@
             <a:r>
               <a:rPr lang="en-US" sz="1300" b="1" dirty="0">
                 <a:solidFill>
-                  <a:srgbClr val="2196F3"/>
+                  <a:srgbClr val="26C6DA"/>
                 </a:solidFill>
                 <a:latin typeface="Arial" pitchFamily="34" charset="0"/>
                 <a:ea typeface="Arial" pitchFamily="34" charset="-122"/>
@@ -7296,7 +7296,7 @@
             <a:r>
               <a:rPr lang="en-US" sz="1300" dirty="0">
                 <a:solidFill>
-                  <a:srgbClr val="2C3E50"/>
+                  <a:srgbClr val="263238"/>
                 </a:solidFill>
                 <a:latin typeface="Arial" pitchFamily="34" charset="0"/>
                 <a:ea typeface="Arial" pitchFamily="34" charset="-122"/>
@@ -7316,7 +7316,7 @@
             <a:r>
               <a:rPr lang="en-US" sz="1300" dirty="0">
                 <a:solidFill>
-                  <a:srgbClr val="FF6B35"/>
+                  <a:srgbClr val="5E35B1"/>
                 </a:solidFill>
                 <a:latin typeface="Arial" pitchFamily="34" charset="0"/>
                 <a:ea typeface="Arial" pitchFamily="34" charset="-122"/>
@@ -7336,7 +7336,7 @@
             <a:r>
               <a:rPr lang="en-US" sz="1300" dirty="0">
                 <a:solidFill>
-                  <a:srgbClr val="2C3E50"/>
+                  <a:srgbClr val="263238"/>
                 </a:solidFill>
                 <a:latin typeface="Arial" pitchFamily="34" charset="0"/>
                 <a:ea typeface="Arial" pitchFamily="34" charset="-122"/>
@@ -7360,7 +7360,7 @@
             <a:r>
               <a:rPr lang="en-US" sz="1300" dirty="0">
                 <a:solidFill>
-                  <a:srgbClr val="2C3E50"/>
+                  <a:srgbClr val="263238"/>
                 </a:solidFill>
                 <a:latin typeface="Arial" pitchFamily="34" charset="0"/>
                 <a:ea typeface="Arial" pitchFamily="34" charset="-122"/>
@@ -7384,7 +7384,7 @@
             <a:r>
               <a:rPr lang="en-US" sz="1300" dirty="0">
                 <a:solidFill>
-                  <a:srgbClr val="2C3E50"/>
+                  <a:srgbClr val="263238"/>
                 </a:solidFill>
                 <a:latin typeface="Arial" pitchFamily="34" charset="0"/>
                 <a:ea typeface="Arial" pitchFamily="34" charset="-122"/>
@@ -7408,7 +7408,7 @@
             <a:r>
               <a:rPr lang="en-US" sz="1300" b="1" dirty="0">
                 <a:solidFill>
-                  <a:srgbClr val="2196F3"/>
+                  <a:srgbClr val="26C6DA"/>
                 </a:solidFill>
                 <a:latin typeface="Arial" pitchFamily="34" charset="0"/>
                 <a:ea typeface="Arial" pitchFamily="34" charset="-122"/>
@@ -7428,7 +7428,7 @@
             <a:r>
               <a:rPr lang="en-US" sz="1300" dirty="0">
                 <a:solidFill>
-                  <a:srgbClr val="2C3E50"/>
+                  <a:srgbClr val="263238"/>
                 </a:solidFill>
                 <a:latin typeface="Arial" pitchFamily="34" charset="0"/>
                 <a:ea typeface="Arial" pitchFamily="34" charset="-122"/>
@@ -7474,7 +7474,7 @@
             <a:r>
               <a:rPr lang="en-US" sz="1200" dirty="0">
                 <a:solidFill>
-                  <a:srgbClr val="2C3E50"/>
+                  <a:srgbClr val="263238"/>
                 </a:solidFill>
                 <a:latin typeface="Arial" pitchFamily="34" charset="0"/>
                 <a:ea typeface="Arial" pitchFamily="34" charset="-122"/>
@@ -7520,7 +7520,7 @@
             <a:r>
               <a:rPr lang="en-US" sz="1200" dirty="0">
                 <a:solidFill>
-                  <a:srgbClr val="2C3E50"/>
+                  <a:srgbClr val="263238"/>
                 </a:solidFill>
                 <a:latin typeface="Arial" pitchFamily="34" charset="0"/>
                 <a:ea typeface="Arial" pitchFamily="34" charset="-122"/>
@@ -7544,7 +7544,7 @@
             <a:r>
               <a:rPr lang="en-US" sz="1200" dirty="0">
                 <a:solidFill>
-                  <a:srgbClr val="2C3E50"/>
+                  <a:srgbClr val="263238"/>
                 </a:solidFill>
                 <a:latin typeface="Arial" pitchFamily="34" charset="0"/>
                 <a:ea typeface="Arial" pitchFamily="34" charset="-122"/>
@@ -7603,7 +7603,7 @@
             <a:avLst/>
           </a:prstGeom>
           <a:solidFill>
-            <a:srgbClr val="181B24"/>
+            <a:srgbClr val="1A237E"/>
           </a:solidFill>
           <a:ln/>
         </p:spPr>
@@ -7690,7 +7690,7 @@
             <a:r>
               <a:rPr lang="en-US" sz="1400" b="1" dirty="0">
                 <a:solidFill>
-                  <a:srgbClr val="2C3E50"/>
+                  <a:srgbClr val="263238"/>
                 </a:solidFill>
                 <a:latin typeface="Arial" pitchFamily="34" charset="0"/>
                 <a:ea typeface="Arial" pitchFamily="34" charset="-122"/>
@@ -7736,7 +7736,7 @@
             <a:r>
               <a:rPr lang="en-US" sz="1300" b="1" dirty="0">
                 <a:solidFill>
-                  <a:srgbClr val="2196F3"/>
+                  <a:srgbClr val="26C6DA"/>
                 </a:solidFill>
                 <a:latin typeface="Arial" pitchFamily="34" charset="0"/>
                 <a:ea typeface="Arial" pitchFamily="34" charset="-122"/>
@@ -7756,7 +7756,7 @@
             <a:r>
               <a:rPr lang="en-US" sz="1300" dirty="0">
                 <a:solidFill>
-                  <a:srgbClr val="2C3E50"/>
+                  <a:srgbClr val="263238"/>
                 </a:solidFill>
                 <a:latin typeface="Arial" pitchFamily="34" charset="0"/>
                 <a:ea typeface="Arial" pitchFamily="34" charset="-122"/>
@@ -7780,7 +7780,7 @@
             <a:r>
               <a:rPr lang="en-US" sz="1300" b="1" dirty="0">
                 <a:solidFill>
-                  <a:srgbClr val="2196F3"/>
+                  <a:srgbClr val="26C6DA"/>
                 </a:solidFill>
                 <a:latin typeface="Arial" pitchFamily="34" charset="0"/>
                 <a:ea typeface="Arial" pitchFamily="34" charset="-122"/>
@@ -7800,7 +7800,7 @@
             <a:r>
               <a:rPr lang="en-US" sz="1300" dirty="0">
                 <a:solidFill>
-                  <a:srgbClr val="2C3E50"/>
+                  <a:srgbClr val="263238"/>
                 </a:solidFill>
                 <a:latin typeface="Arial" pitchFamily="34" charset="0"/>
                 <a:ea typeface="Arial" pitchFamily="34" charset="-122"/>
@@ -7824,7 +7824,7 @@
             <a:r>
               <a:rPr lang="en-US" sz="1300" b="1" dirty="0">
                 <a:solidFill>
-                  <a:srgbClr val="2196F3"/>
+                  <a:srgbClr val="26C6DA"/>
                 </a:solidFill>
                 <a:latin typeface="Arial" pitchFamily="34" charset="0"/>
                 <a:ea typeface="Arial" pitchFamily="34" charset="-122"/>
@@ -7844,7 +7844,7 @@
             <a:r>
               <a:rPr lang="en-US" sz="1300" dirty="0">
                 <a:solidFill>
-                  <a:srgbClr val="2C3E50"/>
+                  <a:srgbClr val="263238"/>
                 </a:solidFill>
                 <a:latin typeface="Arial" pitchFamily="34" charset="0"/>
                 <a:ea typeface="Arial" pitchFamily="34" charset="-122"/>
@@ -7864,7 +7864,7 @@
             <a:r>
               <a:rPr lang="en-US" sz="1300" dirty="0">
                 <a:solidFill>
-                  <a:srgbClr val="FF6B35"/>
+                  <a:srgbClr val="5E35B1"/>
                 </a:solidFill>
                 <a:latin typeface="Arial" pitchFamily="34" charset="0"/>
                 <a:ea typeface="Arial" pitchFamily="34" charset="-122"/>
@@ -7884,7 +7884,7 @@
             <a:r>
               <a:rPr lang="en-US" sz="1300" dirty="0">
                 <a:solidFill>
-                  <a:srgbClr val="2C3E50"/>
+                  <a:srgbClr val="263238"/>
                 </a:solidFill>
                 <a:latin typeface="Arial" pitchFamily="34" charset="0"/>
                 <a:ea typeface="Arial" pitchFamily="34" charset="-122"/>
@@ -7908,7 +7908,7 @@
             <a:r>
               <a:rPr lang="en-US" sz="1300" b="1" dirty="0">
                 <a:solidFill>
-                  <a:srgbClr val="2196F3"/>
+                  <a:srgbClr val="26C6DA"/>
                 </a:solidFill>
                 <a:latin typeface="Arial" pitchFamily="34" charset="0"/>
                 <a:ea typeface="Arial" pitchFamily="34" charset="-122"/>
@@ -7928,7 +7928,7 @@
             <a:r>
               <a:rPr lang="en-US" sz="1300" dirty="0">
                 <a:solidFill>
-                  <a:srgbClr val="2C3E50"/>
+                  <a:srgbClr val="263238"/>
                 </a:solidFill>
                 <a:latin typeface="Arial" pitchFamily="34" charset="0"/>
                 <a:ea typeface="Arial" pitchFamily="34" charset="-122"/>
@@ -7948,7 +7948,7 @@
             <a:r>
               <a:rPr lang="en-US" sz="1300" dirty="0">
                 <a:solidFill>
-                  <a:srgbClr val="FF6B35"/>
+                  <a:srgbClr val="5E35B1"/>
                 </a:solidFill>
                 <a:latin typeface="Arial" pitchFamily="34" charset="0"/>
                 <a:ea typeface="Arial" pitchFamily="34" charset="-122"/>
@@ -7968,7 +7968,7 @@
             <a:r>
               <a:rPr lang="en-US" sz="1300" dirty="0">
                 <a:solidFill>
-                  <a:srgbClr val="2C3E50"/>
+                  <a:srgbClr val="263238"/>
                 </a:solidFill>
                 <a:latin typeface="Arial" pitchFamily="34" charset="0"/>
                 <a:ea typeface="Arial" pitchFamily="34" charset="-122"/>
@@ -7992,7 +7992,7 @@
             <a:r>
               <a:rPr lang="en-US" sz="1300" b="1" dirty="0">
                 <a:solidFill>
-                  <a:srgbClr val="2196F3"/>
+                  <a:srgbClr val="26C6DA"/>
                 </a:solidFill>
                 <a:latin typeface="Arial" pitchFamily="34" charset="0"/>
                 <a:ea typeface="Arial" pitchFamily="34" charset="-122"/>
@@ -8012,7 +8012,7 @@
             <a:r>
               <a:rPr lang="en-US" sz="1300" dirty="0">
                 <a:solidFill>
-                  <a:srgbClr val="2C3E50"/>
+                  <a:srgbClr val="263238"/>
                 </a:solidFill>
                 <a:latin typeface="Arial" pitchFamily="34" charset="0"/>
                 <a:ea typeface="Arial" pitchFamily="34" charset="-122"/>
@@ -8032,7 +8032,7 @@
             <a:r>
               <a:rPr lang="en-US" sz="1300" dirty="0">
                 <a:solidFill>
-                  <a:srgbClr val="FF6B35"/>
+                  <a:srgbClr val="5E35B1"/>
                 </a:solidFill>
                 <a:latin typeface="Arial" pitchFamily="34" charset="0"/>
                 <a:ea typeface="Arial" pitchFamily="34" charset="-122"/>
@@ -8052,7 +8052,7 @@
             <a:r>
               <a:rPr lang="en-US" sz="1300" dirty="0">
                 <a:solidFill>
-                  <a:srgbClr val="2C3E50"/>
+                  <a:srgbClr val="263238"/>
                 </a:solidFill>
                 <a:latin typeface="Arial" pitchFamily="34" charset="0"/>
                 <a:ea typeface="Arial" pitchFamily="34" charset="-122"/>
@@ -8076,7 +8076,7 @@
             <a:r>
               <a:rPr lang="en-US" sz="1300" b="1" dirty="0">
                 <a:solidFill>
-                  <a:srgbClr val="2196F3"/>
+                  <a:srgbClr val="26C6DA"/>
                 </a:solidFill>
                 <a:latin typeface="Arial" pitchFamily="34" charset="0"/>
                 <a:ea typeface="Arial" pitchFamily="34" charset="-122"/>
@@ -8096,7 +8096,7 @@
             <a:r>
               <a:rPr lang="en-US" sz="1300" dirty="0">
                 <a:solidFill>
-                  <a:srgbClr val="2C3E50"/>
+                  <a:srgbClr val="263238"/>
                 </a:solidFill>
                 <a:latin typeface="Arial" pitchFamily="34" charset="0"/>
                 <a:ea typeface="Arial" pitchFamily="34" charset="-122"/>
@@ -8116,7 +8116,7 @@
             <a:r>
               <a:rPr lang="en-US" sz="1300" dirty="0">
                 <a:solidFill>
-                  <a:srgbClr val="FF6B35"/>
+                  <a:srgbClr val="5E35B1"/>
                 </a:solidFill>
                 <a:latin typeface="Arial" pitchFamily="34" charset="0"/>
                 <a:ea typeface="Arial" pitchFamily="34" charset="-122"/>
@@ -8136,7 +8136,7 @@
             <a:r>
               <a:rPr lang="en-US" sz="1300" dirty="0">
                 <a:solidFill>
-                  <a:srgbClr val="2C3E50"/>
+                  <a:srgbClr val="263238"/>
                 </a:solidFill>
                 <a:latin typeface="Arial" pitchFamily="34" charset="0"/>
                 <a:ea typeface="Arial" pitchFamily="34" charset="-122"/>
@@ -8195,7 +8195,7 @@
             <a:avLst/>
           </a:prstGeom>
           <a:solidFill>
-            <a:srgbClr val="181B24"/>
+            <a:srgbClr val="1A237E"/>
           </a:solidFill>
           <a:ln/>
         </p:spPr>
@@ -8282,7 +8282,7 @@
             <a:r>
               <a:rPr lang="en-US" sz="1400" b="1" dirty="0">
                 <a:solidFill>
-                  <a:srgbClr val="2C3E50"/>
+                  <a:srgbClr val="263238"/>
                 </a:solidFill>
                 <a:latin typeface="Arial" pitchFamily="34" charset="0"/>
                 <a:ea typeface="Arial" pitchFamily="34" charset="-122"/>
@@ -8328,7 +8328,7 @@
             <a:r>
               <a:rPr lang="en-US" sz="1300" b="1" dirty="0">
                 <a:solidFill>
-                  <a:srgbClr val="2196F3"/>
+                  <a:srgbClr val="26C6DA"/>
                 </a:solidFill>
                 <a:latin typeface="Arial" pitchFamily="34" charset="0"/>
                 <a:ea typeface="Arial" pitchFamily="34" charset="-122"/>
@@ -8348,7 +8348,7 @@
             <a:r>
               <a:rPr lang="en-US" sz="1300" dirty="0">
                 <a:solidFill>
-                  <a:srgbClr val="2C3E50"/>
+                  <a:srgbClr val="263238"/>
                 </a:solidFill>
                 <a:latin typeface="Arial" pitchFamily="34" charset="0"/>
                 <a:ea typeface="Arial" pitchFamily="34" charset="-122"/>
@@ -8372,7 +8372,7 @@
             <a:r>
               <a:rPr lang="en-US" sz="1300" b="1" dirty="0">
                 <a:solidFill>
-                  <a:srgbClr val="2196F3"/>
+                  <a:srgbClr val="26C6DA"/>
                 </a:solidFill>
                 <a:latin typeface="Arial" pitchFamily="34" charset="0"/>
                 <a:ea typeface="Arial" pitchFamily="34" charset="-122"/>
@@ -8392,7 +8392,7 @@
             <a:r>
               <a:rPr lang="en-US" sz="1300" dirty="0">
                 <a:solidFill>
-                  <a:srgbClr val="2C3E50"/>
+                  <a:srgbClr val="263238"/>
                 </a:solidFill>
                 <a:latin typeface="Arial" pitchFamily="34" charset="0"/>
                 <a:ea typeface="Arial" pitchFamily="34" charset="-122"/>
@@ -8416,7 +8416,7 @@
             <a:r>
               <a:rPr lang="en-US" sz="1300" b="1" dirty="0">
                 <a:solidFill>
-                  <a:srgbClr val="2196F3"/>
+                  <a:srgbClr val="26C6DA"/>
                 </a:solidFill>
                 <a:latin typeface="Arial" pitchFamily="34" charset="0"/>
                 <a:ea typeface="Arial" pitchFamily="34" charset="-122"/>
@@ -8436,7 +8436,7 @@
             <a:r>
               <a:rPr lang="en-US" sz="1300" dirty="0">
                 <a:solidFill>
-                  <a:srgbClr val="2C3E50"/>
+                  <a:srgbClr val="263238"/>
                 </a:solidFill>
                 <a:latin typeface="Arial" pitchFamily="34" charset="0"/>
                 <a:ea typeface="Arial" pitchFamily="34" charset="-122"/>
@@ -8460,7 +8460,7 @@
             <a:r>
               <a:rPr lang="en-US" sz="1300" b="1" dirty="0">
                 <a:solidFill>
-                  <a:srgbClr val="2196F3"/>
+                  <a:srgbClr val="26C6DA"/>
                 </a:solidFill>
                 <a:latin typeface="Arial" pitchFamily="34" charset="0"/>
                 <a:ea typeface="Arial" pitchFamily="34" charset="-122"/>
@@ -8480,7 +8480,7 @@
             <a:r>
               <a:rPr lang="en-US" sz="1300" dirty="0">
                 <a:solidFill>
-                  <a:srgbClr val="2C3E50"/>
+                  <a:srgbClr val="263238"/>
                 </a:solidFill>
                 <a:latin typeface="Arial" pitchFamily="34" charset="0"/>
                 <a:ea typeface="Arial" pitchFamily="34" charset="-122"/>
@@ -8504,7 +8504,7 @@
             <a:r>
               <a:rPr lang="en-US" sz="1300" b="1" dirty="0">
                 <a:solidFill>
-                  <a:srgbClr val="2196F3"/>
+                  <a:srgbClr val="26C6DA"/>
                 </a:solidFill>
                 <a:latin typeface="Arial" pitchFamily="34" charset="0"/>
                 <a:ea typeface="Arial" pitchFamily="34" charset="-122"/>
@@ -8524,7 +8524,7 @@
             <a:r>
               <a:rPr lang="en-US" sz="1300" dirty="0">
                 <a:solidFill>
-                  <a:srgbClr val="2C3E50"/>
+                  <a:srgbClr val="263238"/>
                 </a:solidFill>
                 <a:latin typeface="Arial" pitchFamily="34" charset="0"/>
                 <a:ea typeface="Arial" pitchFamily="34" charset="-122"/>
@@ -8548,7 +8548,7 @@
             <a:r>
               <a:rPr lang="en-US" sz="1300" b="1" dirty="0">
                 <a:solidFill>
-                  <a:srgbClr val="2196F3"/>
+                  <a:srgbClr val="26C6DA"/>
                 </a:solidFill>
                 <a:latin typeface="Arial" pitchFamily="34" charset="0"/>
                 <a:ea typeface="Arial" pitchFamily="34" charset="-122"/>
@@ -8568,7 +8568,7 @@
             <a:r>
               <a:rPr lang="en-US" sz="1300" dirty="0">
                 <a:solidFill>
-                  <a:srgbClr val="2C3E50"/>
+                  <a:srgbClr val="263238"/>
                 </a:solidFill>
                 <a:latin typeface="Arial" pitchFamily="34" charset="0"/>
                 <a:ea typeface="Arial" pitchFamily="34" charset="-122"/>
@@ -8627,7 +8627,7 @@
             <a:avLst/>
           </a:prstGeom>
           <a:solidFill>
-            <a:srgbClr val="181B24"/>
+            <a:srgbClr val="1A237E"/>
           </a:solidFill>
           <a:ln/>
         </p:spPr>
@@ -8714,7 +8714,7 @@
             <a:r>
               <a:rPr lang="en-US" sz="1400" b="1" dirty="0">
                 <a:solidFill>
-                  <a:srgbClr val="2C3E50"/>
+                  <a:srgbClr val="263238"/>
                 </a:solidFill>
                 <a:latin typeface="Arial" pitchFamily="34" charset="0"/>
                 <a:ea typeface="Arial" pitchFamily="34" charset="-122"/>
@@ -8760,7 +8760,7 @@
             <a:r>
               <a:rPr lang="en-US" sz="1300" b="1" dirty="0">
                 <a:solidFill>
-                  <a:srgbClr val="2196F3"/>
+                  <a:srgbClr val="26C6DA"/>
                 </a:solidFill>
                 <a:latin typeface="Arial" pitchFamily="34" charset="0"/>
                 <a:ea typeface="Arial" pitchFamily="34" charset="-122"/>
@@ -8780,7 +8780,7 @@
             <a:r>
               <a:rPr lang="en-US" sz="1300" dirty="0">
                 <a:solidFill>
-                  <a:srgbClr val="2C3E50"/>
+                  <a:srgbClr val="263238"/>
                 </a:solidFill>
                 <a:latin typeface="Arial" pitchFamily="34" charset="0"/>
                 <a:ea typeface="Arial" pitchFamily="34" charset="-122"/>
@@ -8826,7 +8826,7 @@
             <a:r>
               <a:rPr lang="en-US" sz="1200" b="1" dirty="0">
                 <a:solidFill>
-                  <a:srgbClr val="2C3E50"/>
+                  <a:srgbClr val="263238"/>
                 </a:solidFill>
                 <a:latin typeface="Arial" pitchFamily="34" charset="0"/>
                 <a:ea typeface="Arial" pitchFamily="34" charset="-122"/>
@@ -8846,7 +8846,7 @@
             <a:r>
               <a:rPr lang="en-US" sz="1200" dirty="0">
                 <a:solidFill>
-                  <a:srgbClr val="2C3E50"/>
+                  <a:srgbClr val="263238"/>
                 </a:solidFill>
                 <a:latin typeface="Arial" pitchFamily="34" charset="0"/>
                 <a:ea typeface="Arial" pitchFamily="34" charset="-122"/>
@@ -8870,7 +8870,7 @@
             <a:r>
               <a:rPr lang="en-US" sz="1200" b="1" dirty="0">
                 <a:solidFill>
-                  <a:srgbClr val="2C3E50"/>
+                  <a:srgbClr val="263238"/>
                 </a:solidFill>
                 <a:latin typeface="Arial" pitchFamily="34" charset="0"/>
                 <a:ea typeface="Arial" pitchFamily="34" charset="-122"/>
@@ -8890,7 +8890,7 @@
             <a:r>
               <a:rPr lang="en-US" sz="1200" dirty="0">
                 <a:solidFill>
-                  <a:srgbClr val="2C3E50"/>
+                  <a:srgbClr val="263238"/>
                 </a:solidFill>
                 <a:latin typeface="Arial" pitchFamily="34" charset="0"/>
                 <a:ea typeface="Arial" pitchFamily="34" charset="-122"/>
@@ -8914,7 +8914,7 @@
             <a:r>
               <a:rPr lang="en-US" sz="1200" b="1" dirty="0">
                 <a:solidFill>
-                  <a:srgbClr val="2C3E50"/>
+                  <a:srgbClr val="263238"/>
                 </a:solidFill>
                 <a:latin typeface="Arial" pitchFamily="34" charset="0"/>
                 <a:ea typeface="Arial" pitchFamily="34" charset="-122"/>
@@ -8934,7 +8934,7 @@
             <a:r>
               <a:rPr lang="en-US" sz="1200" dirty="0">
                 <a:solidFill>
-                  <a:srgbClr val="2C3E50"/>
+                  <a:srgbClr val="263238"/>
                 </a:solidFill>
                 <a:latin typeface="Arial" pitchFamily="34" charset="0"/>
                 <a:ea typeface="Arial" pitchFamily="34" charset="-122"/>
@@ -8980,7 +8980,7 @@
             <a:r>
               <a:rPr lang="en-US" sz="1200" b="1" dirty="0">
                 <a:solidFill>
-                  <a:srgbClr val="2C3E50"/>
+                  <a:srgbClr val="263238"/>
                 </a:solidFill>
                 <a:latin typeface="Arial" pitchFamily="34" charset="0"/>
                 <a:ea typeface="Arial" pitchFamily="34" charset="-122"/>
@@ -9000,7 +9000,7 @@
             <a:r>
               <a:rPr lang="en-US" sz="1200" dirty="0">
                 <a:solidFill>
-                  <a:srgbClr val="2C3E50"/>
+                  <a:srgbClr val="263238"/>
                 </a:solidFill>
                 <a:latin typeface="Arial" pitchFamily="34" charset="0"/>
                 <a:ea typeface="Arial" pitchFamily="34" charset="-122"/>
@@ -9024,7 +9024,7 @@
             <a:r>
               <a:rPr lang="en-US" sz="1200" b="1" dirty="0">
                 <a:solidFill>
-                  <a:srgbClr val="2C3E50"/>
+                  <a:srgbClr val="263238"/>
                 </a:solidFill>
                 <a:latin typeface="Arial" pitchFamily="34" charset="0"/>
                 <a:ea typeface="Arial" pitchFamily="34" charset="-122"/>
@@ -9044,7 +9044,7 @@
             <a:r>
               <a:rPr lang="en-US" sz="1200" dirty="0">
                 <a:solidFill>
-                  <a:srgbClr val="2C3E50"/>
+                  <a:srgbClr val="263238"/>
                 </a:solidFill>
                 <a:latin typeface="Arial" pitchFamily="34" charset="0"/>
                 <a:ea typeface="Arial" pitchFamily="34" charset="-122"/>

--- a/workspace/github-actions-copilot.pptx
+++ b/workspace/github-actions-copilot.pptx
@@ -2040,38 +2040,8 @@
         </p:nvSpPr>
         <p:spPr>
           <a:xfrm>
-            <a:off x="0" y="0"/>
-            <a:ext cx="152400" cy="5143500"/>
-          </a:xfrm>
-          <a:prstGeom prst="rect">
-            <a:avLst/>
-          </a:prstGeom>
-          <a:solidFill>
-            <a:srgbClr val="26C6DA"/>
-          </a:solidFill>
-          <a:ln/>
-        </p:spPr>
-        <p:txBody>
-          <a:bodyPr wrap="square" rtlCol="0" anchor="ctr"/>
-          <a:lstStyle/>
-          <a:p>
-            <a:pPr indent="0" marL="0">
-              <a:buNone/>
-            </a:pPr>
-            <a:endParaRPr lang="en-US" dirty="0"/>
-          </a:p>
-        </p:txBody>
-      </p:sp>
-      <p:sp>
-        <p:nvSpPr>
-          <p:cNvPr id="3" name="Text 1"/>
-          <p:cNvSpPr/>
-          <p:nvPr/>
-        </p:nvSpPr>
-        <p:spPr>
-          <a:xfrm>
-            <a:off x="914400" y="1602730"/>
-            <a:ext cx="7616952" cy="1341239"/>
+            <a:off x="397520" y="1938040"/>
+            <a:ext cx="8515939" cy="670620"/>
           </a:xfrm>
           <a:prstGeom prst="rect">
             <a:avLst/>
@@ -2109,14 +2079,14 @@
       </p:sp>
       <p:sp>
         <p:nvSpPr>
-          <p:cNvPr id="4" name="Text 2"/>
+          <p:cNvPr id="3" name="Text 1"/>
           <p:cNvSpPr/>
           <p:nvPr/>
         </p:nvSpPr>
         <p:spPr>
           <a:xfrm>
-            <a:off x="914400" y="3197870"/>
-            <a:ext cx="7616952" cy="342900"/>
+            <a:off x="2286000" y="2862560"/>
+            <a:ext cx="4663440" cy="342900"/>
           </a:xfrm>
           <a:prstGeom prst="rect">
             <a:avLst/>
@@ -2186,36 +2156,6 @@
         </p:nvSpPr>
         <p:spPr>
           <a:xfrm>
-            <a:off x="0" y="0"/>
-            <a:ext cx="9144000" cy="1101626"/>
-          </a:xfrm>
-          <a:prstGeom prst="rect">
-            <a:avLst/>
-          </a:prstGeom>
-          <a:solidFill>
-            <a:srgbClr val="1A237E"/>
-          </a:solidFill>
-          <a:ln/>
-        </p:spPr>
-        <p:txBody>
-          <a:bodyPr wrap="square" rtlCol="0" anchor="ctr"/>
-          <a:lstStyle/>
-          <a:p>
-            <a:pPr indent="0" marL="0">
-              <a:buNone/>
-            </a:pPr>
-            <a:endParaRPr lang="en-US" dirty="0"/>
-          </a:p>
-        </p:txBody>
-      </p:sp>
-      <p:sp>
-        <p:nvSpPr>
-          <p:cNvPr id="3" name="Text 1"/>
-          <p:cNvSpPr/>
-          <p:nvPr/>
-        </p:nvSpPr>
-        <p:spPr>
-          <a:xfrm>
             <a:off x="634901" y="317450"/>
             <a:ext cx="8031682" cy="466725"/>
           </a:xfrm>
@@ -2235,7 +2175,7 @@
             <a:r>
               <a:rPr lang="en-US" sz="3200" b="1" dirty="0">
                 <a:solidFill>
-                  <a:srgbClr val="FFFFFF"/>
+                  <a:srgbClr val="1A237E"/>
                 </a:solidFill>
                 <a:latin typeface="Arial" pitchFamily="34" charset="0"/>
                 <a:ea typeface="Arial" pitchFamily="34" charset="-122"/>
@@ -2249,7 +2189,7 @@
       </p:sp>
       <p:sp>
         <p:nvSpPr>
-          <p:cNvPr id="4" name="Text 2"/>
+          <p:cNvPr id="3" name="Text 1"/>
           <p:cNvSpPr/>
           <p:nvPr/>
         </p:nvSpPr>
@@ -2294,7 +2234,7 @@
       </p:sp>
       <p:sp>
         <p:nvSpPr>
-          <p:cNvPr id="5" name="Text 3"/>
+          <p:cNvPr id="4" name="Text 2"/>
           <p:cNvSpPr/>
           <p:nvPr/>
         </p:nvSpPr>
@@ -2628,7 +2568,7 @@
       </p:sp>
       <p:sp>
         <p:nvSpPr>
-          <p:cNvPr id="6" name="Text 4"/>
+          <p:cNvPr id="5" name="Text 3"/>
           <p:cNvSpPr/>
           <p:nvPr/>
         </p:nvSpPr>
@@ -2637,10 +2577,8 @@
             <a:off x="634901" y="4286101"/>
             <a:ext cx="7874198" cy="497681"/>
           </a:xfrm>
-          <a:prstGeom prst="roundRect">
-            <a:avLst>
-              <a:gd name="adj" fmla="val 10207"/>
-            </a:avLst>
+          <a:prstGeom prst="rect">
+            <a:avLst/>
           </a:prstGeom>
           <a:solidFill>
             <a:srgbClr val="F4F6F7"/>
@@ -2660,37 +2598,14 @@
       </p:sp>
       <p:sp>
         <p:nvSpPr>
-          <p:cNvPr id="7" name="Shape 5"/>
+          <p:cNvPr id="6" name="Text 4"/>
           <p:cNvSpPr/>
           <p:nvPr/>
         </p:nvSpPr>
         <p:spPr>
           <a:xfrm>
-            <a:off x="658713" y="4286101"/>
-            <a:ext cx="0" cy="497681"/>
-          </a:xfrm>
-          <a:prstGeom prst="line">
-            <a:avLst/>
-          </a:prstGeom>
-          <a:noFill/>
-          <a:ln w="47625">
-            <a:solidFill>
-              <a:srgbClr val="5E35B1"/>
-            </a:solidFill>
-            <a:prstDash val="solid"/>
-          </a:ln>
-        </p:spPr>
-      </p:sp>
-      <p:sp>
-        <p:nvSpPr>
-          <p:cNvPr id="8" name="Text 6"/>
-          <p:cNvSpPr/>
-          <p:nvPr/>
-        </p:nvSpPr>
-        <p:spPr>
-          <a:xfrm>
-            <a:off x="873026" y="4413052"/>
-            <a:ext cx="7594485" cy="243780"/>
+            <a:off x="825401" y="4413052"/>
+            <a:ext cx="7643062" cy="243780"/>
           </a:xfrm>
           <a:prstGeom prst="rect">
             <a:avLst/>
@@ -2780,36 +2695,6 @@
         </p:nvSpPr>
         <p:spPr>
           <a:xfrm>
-            <a:off x="0" y="0"/>
-            <a:ext cx="9144000" cy="1044476"/>
-          </a:xfrm>
-          <a:prstGeom prst="rect">
-            <a:avLst/>
-          </a:prstGeom>
-          <a:solidFill>
-            <a:srgbClr val="1A237E"/>
-          </a:solidFill>
-          <a:ln/>
-        </p:spPr>
-        <p:txBody>
-          <a:bodyPr wrap="square" rtlCol="0" anchor="ctr"/>
-          <a:lstStyle/>
-          <a:p>
-            <a:pPr indent="0" marL="0">
-              <a:buNone/>
-            </a:pPr>
-            <a:endParaRPr lang="en-US" dirty="0"/>
-          </a:p>
-        </p:txBody>
-      </p:sp>
-      <p:sp>
-        <p:nvSpPr>
-          <p:cNvPr id="3" name="Text 1"/>
-          <p:cNvSpPr/>
-          <p:nvPr/>
-        </p:nvSpPr>
-        <p:spPr>
-          <a:xfrm>
             <a:off x="634901" y="317450"/>
             <a:ext cx="8031682" cy="409575"/>
           </a:xfrm>
@@ -2829,7 +2714,7 @@
             <a:r>
               <a:rPr lang="en-US" sz="2800" b="1" dirty="0">
                 <a:solidFill>
-                  <a:srgbClr val="FFFFFF"/>
+                  <a:srgbClr val="1A237E"/>
                 </a:solidFill>
                 <a:latin typeface="Arial" pitchFamily="34" charset="0"/>
                 <a:ea typeface="Arial" pitchFamily="34" charset="-122"/>
@@ -2843,7 +2728,7 @@
       </p:sp>
       <p:sp>
         <p:nvSpPr>
-          <p:cNvPr id="4" name="Text 2"/>
+          <p:cNvPr id="3" name="Text 1"/>
           <p:cNvSpPr/>
           <p:nvPr/>
         </p:nvSpPr>
@@ -2888,7 +2773,7 @@
       </p:sp>
       <p:sp>
         <p:nvSpPr>
-          <p:cNvPr id="5" name="Text 3"/>
+          <p:cNvPr id="4" name="Text 2"/>
           <p:cNvSpPr/>
           <p:nvPr/>
         </p:nvSpPr>
@@ -2920,7 +2805,7 @@
             <a:r>
               <a:rPr lang="en-US" sz="1300" b="1" dirty="0">
                 <a:solidFill>
-                  <a:srgbClr val="26C6DA"/>
+                  <a:srgbClr val="00838F"/>
                 </a:solidFill>
                 <a:latin typeface="Arial" pitchFamily="34" charset="0"/>
                 <a:ea typeface="Arial" pitchFamily="34" charset="-122"/>
@@ -3012,7 +2897,7 @@
             <a:r>
               <a:rPr lang="en-US" sz="1300" b="1" dirty="0">
                 <a:solidFill>
-                  <a:srgbClr val="26C6DA"/>
+                  <a:srgbClr val="00838F"/>
                 </a:solidFill>
                 <a:latin typeface="Arial" pitchFamily="34" charset="0"/>
                 <a:ea typeface="Arial" pitchFamily="34" charset="-122"/>
@@ -3056,7 +2941,7 @@
             <a:r>
               <a:rPr lang="en-US" sz="1300" b="1" dirty="0">
                 <a:solidFill>
-                  <a:srgbClr val="26C6DA"/>
+                  <a:srgbClr val="00838F"/>
                 </a:solidFill>
                 <a:latin typeface="Arial" pitchFamily="34" charset="0"/>
                 <a:ea typeface="Arial" pitchFamily="34" charset="-122"/>
@@ -3100,7 +2985,7 @@
             <a:r>
               <a:rPr lang="en-US" sz="1300" b="1" dirty="0">
                 <a:solidFill>
-                  <a:srgbClr val="26C6DA"/>
+                  <a:srgbClr val="00838F"/>
                 </a:solidFill>
                 <a:latin typeface="Arial" pitchFamily="34" charset="0"/>
                 <a:ea typeface="Arial" pitchFamily="34" charset="-122"/>
@@ -3144,7 +3029,7 @@
             <a:r>
               <a:rPr lang="en-US" sz="1300" b="1" dirty="0">
                 <a:solidFill>
-                  <a:srgbClr val="26C6DA"/>
+                  <a:srgbClr val="00838F"/>
                 </a:solidFill>
                 <a:latin typeface="Arial" pitchFamily="34" charset="0"/>
                 <a:ea typeface="Arial" pitchFamily="34" charset="-122"/>
@@ -3178,7 +3063,7 @@
       </p:sp>
       <p:sp>
         <p:nvSpPr>
-          <p:cNvPr id="6" name="Text 4"/>
+          <p:cNvPr id="5" name="Text 3"/>
           <p:cNvSpPr/>
           <p:nvPr/>
         </p:nvSpPr>
@@ -3286,36 +3171,6 @@
         </p:nvSpPr>
         <p:spPr>
           <a:xfrm>
-            <a:off x="0" y="0"/>
-            <a:ext cx="9144000" cy="1006376"/>
-          </a:xfrm>
-          <a:prstGeom prst="rect">
-            <a:avLst/>
-          </a:prstGeom>
-          <a:solidFill>
-            <a:srgbClr val="1A237E"/>
-          </a:solidFill>
-          <a:ln/>
-        </p:spPr>
-        <p:txBody>
-          <a:bodyPr wrap="square" rtlCol="0" anchor="ctr"/>
-          <a:lstStyle/>
-          <a:p>
-            <a:pPr indent="0" marL="0">
-              <a:buNone/>
-            </a:pPr>
-            <a:endParaRPr lang="en-US" dirty="0"/>
-          </a:p>
-        </p:txBody>
-      </p:sp>
-      <p:sp>
-        <p:nvSpPr>
-          <p:cNvPr id="3" name="Text 1"/>
-          <p:cNvSpPr/>
-          <p:nvPr/>
-        </p:nvSpPr>
-        <p:spPr>
-          <a:xfrm>
             <a:off x="634901" y="317450"/>
             <a:ext cx="8031682" cy="371475"/>
           </a:xfrm>
@@ -3335,7 +3190,7 @@
             <a:r>
               <a:rPr lang="en-US" sz="2600" b="1" dirty="0">
                 <a:solidFill>
-                  <a:srgbClr val="FFFFFF"/>
+                  <a:srgbClr val="1A237E"/>
                 </a:solidFill>
                 <a:latin typeface="Arial" pitchFamily="34" charset="0"/>
                 <a:ea typeface="Arial" pitchFamily="34" charset="-122"/>
@@ -3349,7 +3204,7 @@
       </p:sp>
       <p:sp>
         <p:nvSpPr>
-          <p:cNvPr id="4" name="Text 2"/>
+          <p:cNvPr id="3" name="Text 1"/>
           <p:cNvSpPr/>
           <p:nvPr/>
         </p:nvSpPr>
@@ -3394,7 +3249,7 @@
       </p:sp>
       <p:sp>
         <p:nvSpPr>
-          <p:cNvPr id="5" name="Text 3"/>
+          <p:cNvPr id="4" name="Text 2"/>
           <p:cNvSpPr/>
           <p:nvPr/>
         </p:nvSpPr>
@@ -3488,7 +3343,7 @@
       </p:sp>
       <p:sp>
         <p:nvSpPr>
-          <p:cNvPr id="6" name="Text 4"/>
+          <p:cNvPr id="5" name="Text 3"/>
           <p:cNvSpPr/>
           <p:nvPr/>
         </p:nvSpPr>
@@ -3533,7 +3388,7 @@
       </p:sp>
       <p:sp>
         <p:nvSpPr>
-          <p:cNvPr id="7" name="Text 5"/>
+          <p:cNvPr id="6" name="Text 4"/>
           <p:cNvSpPr/>
           <p:nvPr/>
         </p:nvSpPr>
@@ -3565,7 +3420,7 @@
             <a:r>
               <a:rPr lang="en-US" sz="1100" b="1" dirty="0">
                 <a:solidFill>
-                  <a:srgbClr val="26C6DA"/>
+                  <a:srgbClr val="00838F"/>
                 </a:solidFill>
                 <a:latin typeface="Arial" pitchFamily="34" charset="0"/>
                 <a:ea typeface="Arial" pitchFamily="34" charset="-122"/>
@@ -3633,7 +3488,7 @@
             <a:r>
               <a:rPr lang="en-US" sz="1100" b="1" dirty="0">
                 <a:solidFill>
-                  <a:srgbClr val="26C6DA"/>
+                  <a:srgbClr val="00838F"/>
                 </a:solidFill>
                 <a:latin typeface="Arial" pitchFamily="34" charset="0"/>
                 <a:ea typeface="Arial" pitchFamily="34" charset="-122"/>
@@ -3721,7 +3576,7 @@
             <a:r>
               <a:rPr lang="en-US" sz="1100" b="1" dirty="0">
                 <a:solidFill>
-                  <a:srgbClr val="26C6DA"/>
+                  <a:srgbClr val="00838F"/>
                 </a:solidFill>
                 <a:latin typeface="Arial" pitchFamily="34" charset="0"/>
                 <a:ea typeface="Arial" pitchFamily="34" charset="-122"/>
@@ -3755,7 +3610,7 @@
       </p:sp>
       <p:sp>
         <p:nvSpPr>
-          <p:cNvPr id="8" name="Text 6"/>
+          <p:cNvPr id="7" name="Text 5"/>
           <p:cNvSpPr/>
           <p:nvPr/>
         </p:nvSpPr>
@@ -3801,7 +3656,7 @@
       </p:sp>
       <p:sp>
         <p:nvSpPr>
-          <p:cNvPr id="9" name="Text 7"/>
+          <p:cNvPr id="8" name="Text 6"/>
           <p:cNvSpPr/>
           <p:nvPr/>
         </p:nvSpPr>
@@ -3905,36 +3760,6 @@
         </p:nvSpPr>
         <p:spPr>
           <a:xfrm>
-            <a:off x="0" y="0"/>
-            <a:ext cx="9144000" cy="1101626"/>
-          </a:xfrm>
-          <a:prstGeom prst="rect">
-            <a:avLst/>
-          </a:prstGeom>
-          <a:solidFill>
-            <a:srgbClr val="1A237E"/>
-          </a:solidFill>
-          <a:ln/>
-        </p:spPr>
-        <p:txBody>
-          <a:bodyPr wrap="square" rtlCol="0" anchor="ctr"/>
-          <a:lstStyle/>
-          <a:p>
-            <a:pPr indent="0" marL="0">
-              <a:buNone/>
-            </a:pPr>
-            <a:endParaRPr lang="en-US" dirty="0"/>
-          </a:p>
-        </p:txBody>
-      </p:sp>
-      <p:sp>
-        <p:nvSpPr>
-          <p:cNvPr id="3" name="Text 1"/>
-          <p:cNvSpPr/>
-          <p:nvPr/>
-        </p:nvSpPr>
-        <p:spPr>
-          <a:xfrm>
             <a:off x="634901" y="317450"/>
             <a:ext cx="8031682" cy="466725"/>
           </a:xfrm>
@@ -3954,7 +3779,7 @@
             <a:r>
               <a:rPr lang="en-US" sz="3200" b="1" dirty="0">
                 <a:solidFill>
-                  <a:srgbClr val="FFFFFF"/>
+                  <a:srgbClr val="1A237E"/>
                 </a:solidFill>
                 <a:latin typeface="Arial" pitchFamily="34" charset="0"/>
                 <a:ea typeface="Arial" pitchFamily="34" charset="-122"/>
@@ -3968,7 +3793,7 @@
       </p:sp>
       <p:sp>
         <p:nvSpPr>
-          <p:cNvPr id="4" name="Text 2"/>
+          <p:cNvPr id="3" name="Text 1"/>
           <p:cNvSpPr/>
           <p:nvPr/>
         </p:nvSpPr>
@@ -4013,7 +3838,7 @@
       </p:sp>
       <p:sp>
         <p:nvSpPr>
-          <p:cNvPr id="5" name="Text 3"/>
+          <p:cNvPr id="4" name="Text 2"/>
           <p:cNvSpPr/>
           <p:nvPr/>
         </p:nvSpPr>
@@ -4045,7 +3870,7 @@
             <a:r>
               <a:rPr lang="en-US" sz="1200" b="1" dirty="0">
                 <a:solidFill>
-                  <a:srgbClr val="26C6DA"/>
+                  <a:srgbClr val="00838F"/>
                 </a:solidFill>
                 <a:latin typeface="Arial" pitchFamily="34" charset="0"/>
                 <a:ea typeface="Arial" pitchFamily="34" charset="-122"/>
@@ -4295,7 +4120,7 @@
       </p:sp>
       <p:sp>
         <p:nvSpPr>
-          <p:cNvPr id="6" name="Text 4"/>
+          <p:cNvPr id="5" name="Text 3"/>
           <p:cNvSpPr/>
           <p:nvPr/>
         </p:nvSpPr>
@@ -4493,7 +4318,7 @@
       </p:sp>
       <p:sp>
         <p:nvSpPr>
-          <p:cNvPr id="7" name="Text 5"/>
+          <p:cNvPr id="6" name="Text 4"/>
           <p:cNvSpPr/>
           <p:nvPr/>
         </p:nvSpPr>
@@ -4502,10 +4327,8 @@
             <a:off x="634901" y="3268563"/>
             <a:ext cx="7874198" cy="1224558"/>
           </a:xfrm>
-          <a:prstGeom prst="roundRect">
-            <a:avLst>
-              <a:gd name="adj" fmla="val 4148"/>
-            </a:avLst>
+          <a:prstGeom prst="rect">
+            <a:avLst/>
           </a:prstGeom>
           <a:solidFill>
             <a:srgbClr val="F4F6F7"/>
@@ -4525,37 +4348,14 @@
       </p:sp>
       <p:sp>
         <p:nvSpPr>
-          <p:cNvPr id="8" name="Shape 6"/>
+          <p:cNvPr id="7" name="Text 5"/>
           <p:cNvSpPr/>
           <p:nvPr/>
         </p:nvSpPr>
         <p:spPr>
           <a:xfrm>
-            <a:off x="658713" y="3268563"/>
-            <a:ext cx="0" cy="1224558"/>
-          </a:xfrm>
-          <a:prstGeom prst="line">
-            <a:avLst/>
-          </a:prstGeom>
-          <a:noFill/>
-          <a:ln w="47625">
-            <a:solidFill>
-              <a:srgbClr val="5E35B1"/>
-            </a:solidFill>
-            <a:prstDash val="solid"/>
-          </a:ln>
-        </p:spPr>
-      </p:sp>
-      <p:sp>
-        <p:nvSpPr>
-          <p:cNvPr id="9" name="Text 7"/>
-          <p:cNvSpPr/>
-          <p:nvPr/>
-        </p:nvSpPr>
-        <p:spPr>
-          <a:xfrm>
-            <a:off x="834926" y="3395514"/>
-            <a:ext cx="7672209" cy="209550"/>
+            <a:off x="787301" y="3395514"/>
+            <a:ext cx="7720786" cy="209550"/>
           </a:xfrm>
           <a:prstGeom prst="rect">
             <a:avLst/>
@@ -4593,14 +4393,14 @@
       </p:sp>
       <p:sp>
         <p:nvSpPr>
-          <p:cNvPr id="10" name="Text 8"/>
+          <p:cNvPr id="8" name="Text 6"/>
           <p:cNvSpPr/>
           <p:nvPr/>
         </p:nvSpPr>
         <p:spPr>
           <a:xfrm>
-            <a:off x="834926" y="3681264"/>
-            <a:ext cx="7521773" cy="659606"/>
+            <a:off x="787301" y="3681264"/>
+            <a:ext cx="7569398" cy="659606"/>
           </a:xfrm>
           <a:prstGeom prst="rect">
             <a:avLst/>
@@ -4725,36 +4525,6 @@
         </p:nvSpPr>
         <p:spPr>
           <a:xfrm>
-            <a:off x="0" y="0"/>
-            <a:ext cx="9144000" cy="1101626"/>
-          </a:xfrm>
-          <a:prstGeom prst="rect">
-            <a:avLst/>
-          </a:prstGeom>
-          <a:solidFill>
-            <a:srgbClr val="1A237E"/>
-          </a:solidFill>
-          <a:ln/>
-        </p:spPr>
-        <p:txBody>
-          <a:bodyPr wrap="square" rtlCol="0" anchor="ctr"/>
-          <a:lstStyle/>
-          <a:p>
-            <a:pPr indent="0" marL="0">
-              <a:buNone/>
-            </a:pPr>
-            <a:endParaRPr lang="en-US" dirty="0"/>
-          </a:p>
-        </p:txBody>
-      </p:sp>
-      <p:sp>
-        <p:nvSpPr>
-          <p:cNvPr id="3" name="Text 1"/>
-          <p:cNvSpPr/>
-          <p:nvPr/>
-        </p:nvSpPr>
-        <p:spPr>
-          <a:xfrm>
             <a:off x="634901" y="317450"/>
             <a:ext cx="8031682" cy="466725"/>
           </a:xfrm>
@@ -4774,7 +4544,7 @@
             <a:r>
               <a:rPr lang="en-US" sz="3200" b="1" dirty="0">
                 <a:solidFill>
-                  <a:srgbClr val="FFFFFF"/>
+                  <a:srgbClr val="1A237E"/>
                 </a:solidFill>
                 <a:latin typeface="Arial" pitchFamily="34" charset="0"/>
                 <a:ea typeface="Arial" pitchFamily="34" charset="-122"/>
@@ -4788,7 +4558,7 @@
       </p:sp>
       <p:sp>
         <p:nvSpPr>
-          <p:cNvPr id="4" name="Text 2"/>
+          <p:cNvPr id="3" name="Text 1"/>
           <p:cNvSpPr/>
           <p:nvPr/>
         </p:nvSpPr>
@@ -4816,7 +4586,7 @@
             <a:r>
               <a:rPr lang="en-US" sz="1400" b="1" dirty="0">
                 <a:solidFill>
-                  <a:srgbClr val="26C6DA"/>
+                  <a:srgbClr val="00838F"/>
                 </a:solidFill>
                 <a:latin typeface="Arial" pitchFamily="34" charset="0"/>
                 <a:ea typeface="Arial" pitchFamily="34" charset="-122"/>
@@ -4830,7 +4600,7 @@
       </p:sp>
       <p:sp>
         <p:nvSpPr>
-          <p:cNvPr id="5" name="Text 3"/>
+          <p:cNvPr id="4" name="Text 2"/>
           <p:cNvSpPr/>
           <p:nvPr/>
         </p:nvSpPr>
@@ -4895,7 +4665,7 @@
       </p:sp>
       <p:sp>
         <p:nvSpPr>
-          <p:cNvPr id="6" name="Text 4"/>
+          <p:cNvPr id="5" name="Text 3"/>
           <p:cNvSpPr/>
           <p:nvPr/>
         </p:nvSpPr>
@@ -4989,7 +4759,7 @@
       </p:sp>
       <p:sp>
         <p:nvSpPr>
-          <p:cNvPr id="7" name="Text 5"/>
+          <p:cNvPr id="6" name="Text 4"/>
           <p:cNvSpPr/>
           <p:nvPr/>
         </p:nvSpPr>
@@ -5054,7 +4824,7 @@
       </p:sp>
       <p:sp>
         <p:nvSpPr>
-          <p:cNvPr id="8" name="Text 6"/>
+          <p:cNvPr id="7" name="Text 5"/>
           <p:cNvSpPr/>
           <p:nvPr/>
         </p:nvSpPr>
@@ -5085,7 +4855,7 @@
             <a:r>
               <a:rPr lang="en-US" sz="1400" b="1" dirty="0">
                 <a:solidFill>
-                  <a:srgbClr val="26C6DA"/>
+                  <a:srgbClr val="00838F"/>
                 </a:solidFill>
                 <a:latin typeface="Arial" pitchFamily="34" charset="0"/>
                 <a:ea typeface="Arial" pitchFamily="34" charset="-122"/>
@@ -5099,7 +4869,7 @@
       </p:sp>
       <p:sp>
         <p:nvSpPr>
-          <p:cNvPr id="9" name="Text 7"/>
+          <p:cNvPr id="8" name="Text 6"/>
           <p:cNvSpPr/>
           <p:nvPr/>
         </p:nvSpPr>
@@ -5231,36 +5001,6 @@
         </p:nvSpPr>
         <p:spPr>
           <a:xfrm>
-            <a:off x="0" y="0"/>
-            <a:ext cx="9144000" cy="1101626"/>
-          </a:xfrm>
-          <a:prstGeom prst="rect">
-            <a:avLst/>
-          </a:prstGeom>
-          <a:solidFill>
-            <a:srgbClr val="1A237E"/>
-          </a:solidFill>
-          <a:ln/>
-        </p:spPr>
-        <p:txBody>
-          <a:bodyPr wrap="square" rtlCol="0" anchor="ctr"/>
-          <a:lstStyle/>
-          <a:p>
-            <a:pPr indent="0" marL="0">
-              <a:buNone/>
-            </a:pPr>
-            <a:endParaRPr lang="en-US" dirty="0"/>
-          </a:p>
-        </p:txBody>
-      </p:sp>
-      <p:sp>
-        <p:nvSpPr>
-          <p:cNvPr id="3" name="Text 1"/>
-          <p:cNvSpPr/>
-          <p:nvPr/>
-        </p:nvSpPr>
-        <p:spPr>
-          <a:xfrm>
             <a:off x="634901" y="317450"/>
             <a:ext cx="8031682" cy="466725"/>
           </a:xfrm>
@@ -5280,7 +5020,7 @@
             <a:r>
               <a:rPr lang="en-US" sz="3200" b="1" dirty="0">
                 <a:solidFill>
-                  <a:srgbClr val="FFFFFF"/>
+                  <a:srgbClr val="1A237E"/>
                 </a:solidFill>
                 <a:latin typeface="Arial" pitchFamily="34" charset="0"/>
                 <a:ea typeface="Arial" pitchFamily="34" charset="-122"/>
@@ -5294,7 +5034,7 @@
       </p:sp>
       <p:sp>
         <p:nvSpPr>
-          <p:cNvPr id="4" name="Text 2"/>
+          <p:cNvPr id="3" name="Text 1"/>
           <p:cNvSpPr/>
           <p:nvPr/>
         </p:nvSpPr>
@@ -5570,36 +5310,6 @@
         </p:nvSpPr>
         <p:spPr>
           <a:xfrm>
-            <a:off x="0" y="0"/>
-            <a:ext cx="9144000" cy="1228725"/>
-          </a:xfrm>
-          <a:prstGeom prst="rect">
-            <a:avLst/>
-          </a:prstGeom>
-          <a:solidFill>
-            <a:srgbClr val="1A237E"/>
-          </a:solidFill>
-          <a:ln/>
-        </p:spPr>
-        <p:txBody>
-          <a:bodyPr wrap="square" rtlCol="0" anchor="ctr"/>
-          <a:lstStyle/>
-          <a:p>
-            <a:pPr indent="0" marL="0">
-              <a:buNone/>
-            </a:pPr>
-            <a:endParaRPr lang="en-US" dirty="0"/>
-          </a:p>
-        </p:txBody>
-      </p:sp>
-      <p:sp>
-        <p:nvSpPr>
-          <p:cNvPr id="3" name="Text 1"/>
-          <p:cNvSpPr/>
-          <p:nvPr/>
-        </p:nvSpPr>
-        <p:spPr>
-          <a:xfrm>
             <a:off x="634901" y="381000"/>
             <a:ext cx="8031682" cy="466725"/>
           </a:xfrm>
@@ -5619,7 +5329,7 @@
             <a:r>
               <a:rPr lang="en-US" sz="3200" b="1" dirty="0">
                 <a:solidFill>
-                  <a:srgbClr val="FFFFFF"/>
+                  <a:srgbClr val="1A237E"/>
                 </a:solidFill>
                 <a:latin typeface="Arial" pitchFamily="34" charset="0"/>
                 <a:ea typeface="Arial" pitchFamily="34" charset="-122"/>
@@ -5633,7 +5343,7 @@
       </p:sp>
       <p:sp>
         <p:nvSpPr>
-          <p:cNvPr id="4" name="Text 2"/>
+          <p:cNvPr id="3" name="Text 1"/>
           <p:cNvSpPr/>
           <p:nvPr/>
         </p:nvSpPr>
@@ -5777,7 +5487,7 @@
             <a:r>
               <a:rPr lang="en-US" sz="1400" b="1" dirty="0">
                 <a:solidFill>
-                  <a:srgbClr val="26C6DA"/>
+                  <a:srgbClr val="00838F"/>
                 </a:solidFill>
                 <a:latin typeface="Arial" pitchFamily="34" charset="0"/>
                 <a:ea typeface="Arial" pitchFamily="34" charset="-122"/>
@@ -5821,7 +5531,7 @@
             <a:r>
               <a:rPr lang="en-US" sz="1400" b="1" dirty="0">
                 <a:solidFill>
-                  <a:srgbClr val="26C6DA"/>
+                  <a:srgbClr val="00838F"/>
                 </a:solidFill>
                 <a:latin typeface="Arial" pitchFamily="34" charset="0"/>
                 <a:ea typeface="Arial" pitchFamily="34" charset="-122"/>
@@ -5865,7 +5575,7 @@
             <a:r>
               <a:rPr lang="en-US" sz="1400" b="1" dirty="0">
                 <a:solidFill>
-                  <a:srgbClr val="26C6DA"/>
+                  <a:srgbClr val="00838F"/>
                 </a:solidFill>
                 <a:latin typeface="Arial" pitchFamily="34" charset="0"/>
                 <a:ea typeface="Arial" pitchFamily="34" charset="-122"/>
@@ -5899,7 +5609,7 @@
       </p:sp>
       <p:sp>
         <p:nvSpPr>
-          <p:cNvPr id="5" name="Text 3"/>
+          <p:cNvPr id="4" name="Text 2"/>
           <p:cNvSpPr/>
           <p:nvPr/>
         </p:nvSpPr>
@@ -6007,36 +5717,6 @@
         </p:nvSpPr>
         <p:spPr>
           <a:xfrm>
-            <a:off x="0" y="0"/>
-            <a:ext cx="9144000" cy="1228725"/>
-          </a:xfrm>
-          <a:prstGeom prst="rect">
-            <a:avLst/>
-          </a:prstGeom>
-          <a:solidFill>
-            <a:srgbClr val="1A237E"/>
-          </a:solidFill>
-          <a:ln/>
-        </p:spPr>
-        <p:txBody>
-          <a:bodyPr wrap="square" rtlCol="0" anchor="ctr"/>
-          <a:lstStyle/>
-          <a:p>
-            <a:pPr indent="0" marL="0">
-              <a:buNone/>
-            </a:pPr>
-            <a:endParaRPr lang="en-US" dirty="0"/>
-          </a:p>
-        </p:txBody>
-      </p:sp>
-      <p:sp>
-        <p:nvSpPr>
-          <p:cNvPr id="3" name="Text 1"/>
-          <p:cNvSpPr/>
-          <p:nvPr/>
-        </p:nvSpPr>
-        <p:spPr>
-          <a:xfrm>
             <a:off x="634901" y="381000"/>
             <a:ext cx="8031682" cy="466725"/>
           </a:xfrm>
@@ -6056,7 +5736,7 @@
             <a:r>
               <a:rPr lang="en-US" sz="3200" b="1" dirty="0">
                 <a:solidFill>
-                  <a:srgbClr val="FFFFFF"/>
+                  <a:srgbClr val="1A237E"/>
                 </a:solidFill>
                 <a:latin typeface="Arial" pitchFamily="34" charset="0"/>
                 <a:ea typeface="Arial" pitchFamily="34" charset="-122"/>
@@ -6070,7 +5750,7 @@
       </p:sp>
       <p:sp>
         <p:nvSpPr>
-          <p:cNvPr id="4" name="Text 2"/>
+          <p:cNvPr id="3" name="Text 1"/>
           <p:cNvSpPr/>
           <p:nvPr/>
         </p:nvSpPr>
@@ -6098,7 +5778,7 @@
             <a:r>
               <a:rPr lang="en-US" sz="1800" b="1" dirty="0">
                 <a:solidFill>
-                  <a:srgbClr val="26C6DA"/>
+                  <a:srgbClr val="00838F"/>
                 </a:solidFill>
                 <a:latin typeface="Arial" pitchFamily="34" charset="0"/>
                 <a:ea typeface="Arial" pitchFamily="34" charset="-122"/>
@@ -6112,7 +5792,7 @@
       </p:sp>
       <p:sp>
         <p:nvSpPr>
-          <p:cNvPr id="5" name="Text 3"/>
+          <p:cNvPr id="4" name="Text 2"/>
           <p:cNvSpPr/>
           <p:nvPr/>
         </p:nvSpPr>
@@ -6157,7 +5837,7 @@
       </p:sp>
       <p:sp>
         <p:nvSpPr>
-          <p:cNvPr id="6" name="Text 4"/>
+          <p:cNvPr id="5" name="Text 3"/>
           <p:cNvSpPr/>
           <p:nvPr/>
         </p:nvSpPr>
@@ -6185,7 +5865,7 @@
             <a:r>
               <a:rPr lang="en-US" sz="1800" b="1" dirty="0">
                 <a:solidFill>
-                  <a:srgbClr val="26C6DA"/>
+                  <a:srgbClr val="00838F"/>
                 </a:solidFill>
                 <a:latin typeface="Arial" pitchFamily="34" charset="0"/>
                 <a:ea typeface="Arial" pitchFamily="34" charset="-122"/>
@@ -6199,7 +5879,7 @@
       </p:sp>
       <p:sp>
         <p:nvSpPr>
-          <p:cNvPr id="7" name="Text 5"/>
+          <p:cNvPr id="6" name="Text 4"/>
           <p:cNvSpPr/>
           <p:nvPr/>
         </p:nvSpPr>
@@ -6244,7 +5924,7 @@
       </p:sp>
       <p:sp>
         <p:nvSpPr>
-          <p:cNvPr id="8" name="Text 6"/>
+          <p:cNvPr id="7" name="Text 5"/>
           <p:cNvSpPr/>
           <p:nvPr/>
         </p:nvSpPr>
@@ -6253,10 +5933,8 @@
             <a:off x="634901" y="3308598"/>
             <a:ext cx="7874198" cy="1462385"/>
           </a:xfrm>
-          <a:prstGeom prst="roundRect">
-            <a:avLst>
-              <a:gd name="adj" fmla="val 5211"/>
-            </a:avLst>
+          <a:prstGeom prst="rect">
+            <a:avLst/>
           </a:prstGeom>
           <a:solidFill>
             <a:srgbClr val="F4F6F7"/>
@@ -6276,37 +5954,14 @@
       </p:sp>
       <p:sp>
         <p:nvSpPr>
-          <p:cNvPr id="9" name="Shape 7"/>
+          <p:cNvPr id="8" name="Text 6"/>
           <p:cNvSpPr/>
           <p:nvPr/>
         </p:nvSpPr>
         <p:spPr>
           <a:xfrm>
-            <a:off x="658713" y="3308598"/>
-            <a:ext cx="0" cy="1462385"/>
-          </a:xfrm>
-          <a:prstGeom prst="line">
-            <a:avLst/>
-          </a:prstGeom>
-          <a:noFill/>
-          <a:ln w="47625">
-            <a:solidFill>
-              <a:srgbClr val="5E35B1"/>
-            </a:solidFill>
-            <a:prstDash val="solid"/>
-          </a:ln>
-        </p:spPr>
-      </p:sp>
-      <p:sp>
-        <p:nvSpPr>
-          <p:cNvPr id="10" name="Text 8"/>
-          <p:cNvSpPr/>
-          <p:nvPr/>
-        </p:nvSpPr>
-        <p:spPr>
-          <a:xfrm>
-            <a:off x="834926" y="3460998"/>
-            <a:ext cx="7672209" cy="264021"/>
+            <a:off x="787301" y="3460998"/>
+            <a:ext cx="7720786" cy="264021"/>
           </a:xfrm>
           <a:prstGeom prst="rect">
             <a:avLst/>
@@ -6341,14 +5996,14 @@
       </p:sp>
       <p:sp>
         <p:nvSpPr>
-          <p:cNvPr id="11" name="Text 9"/>
+          <p:cNvPr id="9" name="Text 7"/>
           <p:cNvSpPr/>
           <p:nvPr/>
         </p:nvSpPr>
         <p:spPr>
           <a:xfrm>
-            <a:off x="834926" y="3826520"/>
-            <a:ext cx="7521773" cy="792063"/>
+            <a:off x="787301" y="3826520"/>
+            <a:ext cx="7569398" cy="792063"/>
           </a:xfrm>
           <a:prstGeom prst="rect">
             <a:avLst/>
@@ -6464,36 +6119,6 @@
         </p:nvSpPr>
         <p:spPr>
           <a:xfrm>
-            <a:off x="0" y="0"/>
-            <a:ext cx="9144000" cy="1101626"/>
-          </a:xfrm>
-          <a:prstGeom prst="rect">
-            <a:avLst/>
-          </a:prstGeom>
-          <a:solidFill>
-            <a:srgbClr val="1A237E"/>
-          </a:solidFill>
-          <a:ln/>
-        </p:spPr>
-        <p:txBody>
-          <a:bodyPr wrap="square" rtlCol="0" anchor="ctr"/>
-          <a:lstStyle/>
-          <a:p>
-            <a:pPr indent="0" marL="0">
-              <a:buNone/>
-            </a:pPr>
-            <a:endParaRPr lang="en-US" dirty="0"/>
-          </a:p>
-        </p:txBody>
-      </p:sp>
-      <p:sp>
-        <p:nvSpPr>
-          <p:cNvPr id="3" name="Text 1"/>
-          <p:cNvSpPr/>
-          <p:nvPr/>
-        </p:nvSpPr>
-        <p:spPr>
-          <a:xfrm>
             <a:off x="634901" y="317450"/>
             <a:ext cx="8031682" cy="466725"/>
           </a:xfrm>
@@ -6513,7 +6138,7 @@
             <a:r>
               <a:rPr lang="en-US" sz="3200" b="1" dirty="0">
                 <a:solidFill>
-                  <a:srgbClr val="FFFFFF"/>
+                  <a:srgbClr val="1A237E"/>
                 </a:solidFill>
                 <a:latin typeface="Arial" pitchFamily="34" charset="0"/>
                 <a:ea typeface="Arial" pitchFamily="34" charset="-122"/>
@@ -6527,7 +6152,7 @@
       </p:sp>
       <p:sp>
         <p:nvSpPr>
-          <p:cNvPr id="4" name="Text 2"/>
+          <p:cNvPr id="3" name="Text 1"/>
           <p:cNvSpPr/>
           <p:nvPr/>
         </p:nvSpPr>
@@ -6572,7 +6197,7 @@
       </p:sp>
       <p:sp>
         <p:nvSpPr>
-          <p:cNvPr id="5" name="Text 3"/>
+          <p:cNvPr id="4" name="Text 2"/>
           <p:cNvSpPr/>
           <p:nvPr/>
         </p:nvSpPr>
@@ -6604,7 +6229,7 @@
             <a:r>
               <a:rPr lang="en-US" sz="1300" b="1" dirty="0">
                 <a:solidFill>
-                  <a:srgbClr val="26C6DA"/>
+                  <a:srgbClr val="00838F"/>
                 </a:solidFill>
                 <a:latin typeface="Arial" pitchFamily="34" charset="0"/>
                 <a:ea typeface="Arial" pitchFamily="34" charset="-122"/>
@@ -6648,7 +6273,7 @@
             <a:r>
               <a:rPr lang="en-US" sz="1300" b="1" dirty="0">
                 <a:solidFill>
-                  <a:srgbClr val="26C6DA"/>
+                  <a:srgbClr val="00838F"/>
                 </a:solidFill>
                 <a:latin typeface="Arial" pitchFamily="34" charset="0"/>
                 <a:ea typeface="Arial" pitchFamily="34" charset="-122"/>
@@ -6692,7 +6317,7 @@
             <a:r>
               <a:rPr lang="en-US" sz="1300" b="1" dirty="0">
                 <a:solidFill>
-                  <a:srgbClr val="26C6DA"/>
+                  <a:srgbClr val="00838F"/>
                 </a:solidFill>
                 <a:latin typeface="Arial" pitchFamily="34" charset="0"/>
                 <a:ea typeface="Arial" pitchFamily="34" charset="-122"/>
@@ -6736,7 +6361,7 @@
             <a:r>
               <a:rPr lang="en-US" sz="1300" b="1" dirty="0">
                 <a:solidFill>
-                  <a:srgbClr val="26C6DA"/>
+                  <a:srgbClr val="00838F"/>
                 </a:solidFill>
                 <a:latin typeface="Arial" pitchFamily="34" charset="0"/>
                 <a:ea typeface="Arial" pitchFamily="34" charset="-122"/>
@@ -6780,7 +6405,7 @@
             <a:r>
               <a:rPr lang="en-US" sz="1300" b="1" dirty="0">
                 <a:solidFill>
-                  <a:srgbClr val="26C6DA"/>
+                  <a:srgbClr val="00838F"/>
                 </a:solidFill>
                 <a:latin typeface="Arial" pitchFamily="34" charset="0"/>
                 <a:ea typeface="Arial" pitchFamily="34" charset="-122"/>
@@ -6824,7 +6449,7 @@
             <a:r>
               <a:rPr lang="en-US" sz="1300" b="1" dirty="0">
                 <a:solidFill>
-                  <a:srgbClr val="26C6DA"/>
+                  <a:srgbClr val="00838F"/>
                 </a:solidFill>
                 <a:latin typeface="Arial" pitchFamily="34" charset="0"/>
                 <a:ea typeface="Arial" pitchFamily="34" charset="-122"/>
@@ -6868,7 +6493,7 @@
             <a:r>
               <a:rPr lang="en-US" sz="1300" b="1" dirty="0">
                 <a:solidFill>
-                  <a:srgbClr val="26C6DA"/>
+                  <a:srgbClr val="00838F"/>
                 </a:solidFill>
                 <a:latin typeface="Arial" pitchFamily="34" charset="0"/>
                 <a:ea typeface="Arial" pitchFamily="34" charset="-122"/>
@@ -6912,7 +6537,7 @@
             <a:r>
               <a:rPr lang="en-US" sz="1300" b="1" dirty="0">
                 <a:solidFill>
-                  <a:srgbClr val="26C6DA"/>
+                  <a:srgbClr val="00838F"/>
                 </a:solidFill>
                 <a:latin typeface="Arial" pitchFamily="34" charset="0"/>
                 <a:ea typeface="Arial" pitchFamily="34" charset="-122"/>
@@ -6956,7 +6581,7 @@
             <a:r>
               <a:rPr lang="en-US" sz="1300" b="1" dirty="0">
                 <a:solidFill>
-                  <a:srgbClr val="26C6DA"/>
+                  <a:srgbClr val="00838F"/>
                 </a:solidFill>
                 <a:latin typeface="Arial" pitchFamily="34" charset="0"/>
                 <a:ea typeface="Arial" pitchFamily="34" charset="-122"/>
@@ -7028,36 +6653,6 @@
         </p:nvSpPr>
         <p:spPr>
           <a:xfrm>
-            <a:off x="0" y="0"/>
-            <a:ext cx="9144000" cy="1044476"/>
-          </a:xfrm>
-          <a:prstGeom prst="rect">
-            <a:avLst/>
-          </a:prstGeom>
-          <a:solidFill>
-            <a:srgbClr val="1A237E"/>
-          </a:solidFill>
-          <a:ln/>
-        </p:spPr>
-        <p:txBody>
-          <a:bodyPr wrap="square" rtlCol="0" anchor="ctr"/>
-          <a:lstStyle/>
-          <a:p>
-            <a:pPr indent="0" marL="0">
-              <a:buNone/>
-            </a:pPr>
-            <a:endParaRPr lang="en-US" dirty="0"/>
-          </a:p>
-        </p:txBody>
-      </p:sp>
-      <p:sp>
-        <p:nvSpPr>
-          <p:cNvPr id="3" name="Text 1"/>
-          <p:cNvSpPr/>
-          <p:nvPr/>
-        </p:nvSpPr>
-        <p:spPr>
-          <a:xfrm>
             <a:off x="634901" y="317450"/>
             <a:ext cx="8031682" cy="409575"/>
           </a:xfrm>
@@ -7077,7 +6672,7 @@
             <a:r>
               <a:rPr lang="en-US" sz="2800" b="1" dirty="0">
                 <a:solidFill>
-                  <a:srgbClr val="FFFFFF"/>
+                  <a:srgbClr val="1A237E"/>
                 </a:solidFill>
                 <a:latin typeface="Arial" pitchFamily="34" charset="0"/>
                 <a:ea typeface="Arial" pitchFamily="34" charset="-122"/>
@@ -7091,7 +6686,7 @@
       </p:sp>
       <p:sp>
         <p:nvSpPr>
-          <p:cNvPr id="4" name="Text 2"/>
+          <p:cNvPr id="3" name="Text 1"/>
           <p:cNvSpPr/>
           <p:nvPr/>
         </p:nvSpPr>
@@ -7136,7 +6731,7 @@
       </p:sp>
       <p:sp>
         <p:nvSpPr>
-          <p:cNvPr id="5" name="Text 3"/>
+          <p:cNvPr id="4" name="Text 2"/>
           <p:cNvSpPr/>
           <p:nvPr/>
         </p:nvSpPr>
@@ -7168,7 +6763,7 @@
             <a:r>
               <a:rPr lang="en-US" sz="1300" b="1" dirty="0">
                 <a:solidFill>
-                  <a:srgbClr val="26C6DA"/>
+                  <a:srgbClr val="00838F"/>
                 </a:solidFill>
                 <a:latin typeface="Arial" pitchFamily="34" charset="0"/>
                 <a:ea typeface="Arial" pitchFamily="34" charset="-122"/>
@@ -7276,7 +6871,7 @@
             <a:r>
               <a:rPr lang="en-US" sz="1300" b="1" dirty="0">
                 <a:solidFill>
-                  <a:srgbClr val="26C6DA"/>
+                  <a:srgbClr val="00838F"/>
                 </a:solidFill>
                 <a:latin typeface="Arial" pitchFamily="34" charset="0"/>
                 <a:ea typeface="Arial" pitchFamily="34" charset="-122"/>
@@ -7408,7 +7003,7 @@
             <a:r>
               <a:rPr lang="en-US" sz="1300" b="1" dirty="0">
                 <a:solidFill>
-                  <a:srgbClr val="26C6DA"/>
+                  <a:srgbClr val="00838F"/>
                 </a:solidFill>
                 <a:latin typeface="Arial" pitchFamily="34" charset="0"/>
                 <a:ea typeface="Arial" pitchFamily="34" charset="-122"/>
@@ -7442,7 +7037,7 @@
       </p:sp>
       <p:sp>
         <p:nvSpPr>
-          <p:cNvPr id="6" name="Text 4"/>
+          <p:cNvPr id="5" name="Text 3"/>
           <p:cNvSpPr/>
           <p:nvPr/>
         </p:nvSpPr>
@@ -7488,7 +7083,7 @@
       </p:sp>
       <p:sp>
         <p:nvSpPr>
-          <p:cNvPr id="7" name="Text 5"/>
+          <p:cNvPr id="6" name="Text 4"/>
           <p:cNvSpPr/>
           <p:nvPr/>
         </p:nvSpPr>
@@ -7596,36 +7191,6 @@
         </p:nvSpPr>
         <p:spPr>
           <a:xfrm>
-            <a:off x="0" y="0"/>
-            <a:ext cx="9144000" cy="1101626"/>
-          </a:xfrm>
-          <a:prstGeom prst="rect">
-            <a:avLst/>
-          </a:prstGeom>
-          <a:solidFill>
-            <a:srgbClr val="1A237E"/>
-          </a:solidFill>
-          <a:ln/>
-        </p:spPr>
-        <p:txBody>
-          <a:bodyPr wrap="square" rtlCol="0" anchor="ctr"/>
-          <a:lstStyle/>
-          <a:p>
-            <a:pPr indent="0" marL="0">
-              <a:buNone/>
-            </a:pPr>
-            <a:endParaRPr lang="en-US" dirty="0"/>
-          </a:p>
-        </p:txBody>
-      </p:sp>
-      <p:sp>
-        <p:nvSpPr>
-          <p:cNvPr id="3" name="Text 1"/>
-          <p:cNvSpPr/>
-          <p:nvPr/>
-        </p:nvSpPr>
-        <p:spPr>
-          <a:xfrm>
             <a:off x="634901" y="317450"/>
             <a:ext cx="8031682" cy="466725"/>
           </a:xfrm>
@@ -7645,7 +7210,7 @@
             <a:r>
               <a:rPr lang="en-US" sz="3200" b="1" dirty="0">
                 <a:solidFill>
-                  <a:srgbClr val="FFFFFF"/>
+                  <a:srgbClr val="1A237E"/>
                 </a:solidFill>
                 <a:latin typeface="Arial" pitchFamily="34" charset="0"/>
                 <a:ea typeface="Arial" pitchFamily="34" charset="-122"/>
@@ -7659,7 +7224,7 @@
       </p:sp>
       <p:sp>
         <p:nvSpPr>
-          <p:cNvPr id="4" name="Text 2"/>
+          <p:cNvPr id="3" name="Text 1"/>
           <p:cNvSpPr/>
           <p:nvPr/>
         </p:nvSpPr>
@@ -7704,7 +7269,7 @@
       </p:sp>
       <p:sp>
         <p:nvSpPr>
-          <p:cNvPr id="5" name="Text 3"/>
+          <p:cNvPr id="4" name="Text 2"/>
           <p:cNvSpPr/>
           <p:nvPr/>
         </p:nvSpPr>
@@ -7736,7 +7301,7 @@
             <a:r>
               <a:rPr lang="en-US" sz="1300" b="1" dirty="0">
                 <a:solidFill>
-                  <a:srgbClr val="26C6DA"/>
+                  <a:srgbClr val="00838F"/>
                 </a:solidFill>
                 <a:latin typeface="Arial" pitchFamily="34" charset="0"/>
                 <a:ea typeface="Arial" pitchFamily="34" charset="-122"/>
@@ -7780,7 +7345,7 @@
             <a:r>
               <a:rPr lang="en-US" sz="1300" b="1" dirty="0">
                 <a:solidFill>
-                  <a:srgbClr val="26C6DA"/>
+                  <a:srgbClr val="00838F"/>
                 </a:solidFill>
                 <a:latin typeface="Arial" pitchFamily="34" charset="0"/>
                 <a:ea typeface="Arial" pitchFamily="34" charset="-122"/>
@@ -7824,7 +7389,7 @@
             <a:r>
               <a:rPr lang="en-US" sz="1300" b="1" dirty="0">
                 <a:solidFill>
-                  <a:srgbClr val="26C6DA"/>
+                  <a:srgbClr val="00838F"/>
                 </a:solidFill>
                 <a:latin typeface="Arial" pitchFamily="34" charset="0"/>
                 <a:ea typeface="Arial" pitchFamily="34" charset="-122"/>
@@ -7908,7 +7473,7 @@
             <a:r>
               <a:rPr lang="en-US" sz="1300" b="1" dirty="0">
                 <a:solidFill>
-                  <a:srgbClr val="26C6DA"/>
+                  <a:srgbClr val="00838F"/>
                 </a:solidFill>
                 <a:latin typeface="Arial" pitchFamily="34" charset="0"/>
                 <a:ea typeface="Arial" pitchFamily="34" charset="-122"/>
@@ -7992,7 +7557,7 @@
             <a:r>
               <a:rPr lang="en-US" sz="1300" b="1" dirty="0">
                 <a:solidFill>
-                  <a:srgbClr val="26C6DA"/>
+                  <a:srgbClr val="00838F"/>
                 </a:solidFill>
                 <a:latin typeface="Arial" pitchFamily="34" charset="0"/>
                 <a:ea typeface="Arial" pitchFamily="34" charset="-122"/>
@@ -8076,7 +7641,7 @@
             <a:r>
               <a:rPr lang="en-US" sz="1300" b="1" dirty="0">
                 <a:solidFill>
-                  <a:srgbClr val="26C6DA"/>
+                  <a:srgbClr val="00838F"/>
                 </a:solidFill>
                 <a:latin typeface="Arial" pitchFamily="34" charset="0"/>
                 <a:ea typeface="Arial" pitchFamily="34" charset="-122"/>
@@ -8188,36 +7753,6 @@
         </p:nvSpPr>
         <p:spPr>
           <a:xfrm>
-            <a:off x="0" y="0"/>
-            <a:ext cx="9144000" cy="1101626"/>
-          </a:xfrm>
-          <a:prstGeom prst="rect">
-            <a:avLst/>
-          </a:prstGeom>
-          <a:solidFill>
-            <a:srgbClr val="1A237E"/>
-          </a:solidFill>
-          <a:ln/>
-        </p:spPr>
-        <p:txBody>
-          <a:bodyPr wrap="square" rtlCol="0" anchor="ctr"/>
-          <a:lstStyle/>
-          <a:p>
-            <a:pPr indent="0" marL="0">
-              <a:buNone/>
-            </a:pPr>
-            <a:endParaRPr lang="en-US" dirty="0"/>
-          </a:p>
-        </p:txBody>
-      </p:sp>
-      <p:sp>
-        <p:nvSpPr>
-          <p:cNvPr id="3" name="Text 1"/>
-          <p:cNvSpPr/>
-          <p:nvPr/>
-        </p:nvSpPr>
-        <p:spPr>
-          <a:xfrm>
             <a:off x="634901" y="317450"/>
             <a:ext cx="8031682" cy="466725"/>
           </a:xfrm>
@@ -8237,7 +7772,7 @@
             <a:r>
               <a:rPr lang="en-US" sz="3200" b="1" dirty="0">
                 <a:solidFill>
-                  <a:srgbClr val="FFFFFF"/>
+                  <a:srgbClr val="1A237E"/>
                 </a:solidFill>
                 <a:latin typeface="Arial" pitchFamily="34" charset="0"/>
                 <a:ea typeface="Arial" pitchFamily="34" charset="-122"/>
@@ -8251,7 +7786,7 @@
       </p:sp>
       <p:sp>
         <p:nvSpPr>
-          <p:cNvPr id="4" name="Text 2"/>
+          <p:cNvPr id="3" name="Text 1"/>
           <p:cNvSpPr/>
           <p:nvPr/>
         </p:nvSpPr>
@@ -8296,7 +7831,7 @@
       </p:sp>
       <p:sp>
         <p:nvSpPr>
-          <p:cNvPr id="5" name="Text 3"/>
+          <p:cNvPr id="4" name="Text 2"/>
           <p:cNvSpPr/>
           <p:nvPr/>
         </p:nvSpPr>
@@ -8328,7 +7863,7 @@
             <a:r>
               <a:rPr lang="en-US" sz="1300" b="1" dirty="0">
                 <a:solidFill>
-                  <a:srgbClr val="26C6DA"/>
+                  <a:srgbClr val="00838F"/>
                 </a:solidFill>
                 <a:latin typeface="Arial" pitchFamily="34" charset="0"/>
                 <a:ea typeface="Arial" pitchFamily="34" charset="-122"/>
@@ -8372,7 +7907,7 @@
             <a:r>
               <a:rPr lang="en-US" sz="1300" b="1" dirty="0">
                 <a:solidFill>
-                  <a:srgbClr val="26C6DA"/>
+                  <a:srgbClr val="00838F"/>
                 </a:solidFill>
                 <a:latin typeface="Arial" pitchFamily="34" charset="0"/>
                 <a:ea typeface="Arial" pitchFamily="34" charset="-122"/>
@@ -8416,7 +7951,7 @@
             <a:r>
               <a:rPr lang="en-US" sz="1300" b="1" dirty="0">
                 <a:solidFill>
-                  <a:srgbClr val="26C6DA"/>
+                  <a:srgbClr val="00838F"/>
                 </a:solidFill>
                 <a:latin typeface="Arial" pitchFamily="34" charset="0"/>
                 <a:ea typeface="Arial" pitchFamily="34" charset="-122"/>
@@ -8460,7 +7995,7 @@
             <a:r>
               <a:rPr lang="en-US" sz="1300" b="1" dirty="0">
                 <a:solidFill>
-                  <a:srgbClr val="26C6DA"/>
+                  <a:srgbClr val="00838F"/>
                 </a:solidFill>
                 <a:latin typeface="Arial" pitchFamily="34" charset="0"/>
                 <a:ea typeface="Arial" pitchFamily="34" charset="-122"/>
@@ -8504,7 +8039,7 @@
             <a:r>
               <a:rPr lang="en-US" sz="1300" b="1" dirty="0">
                 <a:solidFill>
-                  <a:srgbClr val="26C6DA"/>
+                  <a:srgbClr val="00838F"/>
                 </a:solidFill>
                 <a:latin typeface="Arial" pitchFamily="34" charset="0"/>
                 <a:ea typeface="Arial" pitchFamily="34" charset="-122"/>
@@ -8548,7 +8083,7 @@
             <a:r>
               <a:rPr lang="en-US" sz="1300" b="1" dirty="0">
                 <a:solidFill>
-                  <a:srgbClr val="26C6DA"/>
+                  <a:srgbClr val="00838F"/>
                 </a:solidFill>
                 <a:latin typeface="Arial" pitchFamily="34" charset="0"/>
                 <a:ea typeface="Arial" pitchFamily="34" charset="-122"/>
@@ -8620,36 +8155,6 @@
         </p:nvSpPr>
         <p:spPr>
           <a:xfrm>
-            <a:off x="0" y="0"/>
-            <a:ext cx="9144000" cy="1377851"/>
-          </a:xfrm>
-          <a:prstGeom prst="rect">
-            <a:avLst/>
-          </a:prstGeom>
-          <a:solidFill>
-            <a:srgbClr val="1A237E"/>
-          </a:solidFill>
-          <a:ln/>
-        </p:spPr>
-        <p:txBody>
-          <a:bodyPr wrap="square" rtlCol="0" anchor="ctr"/>
-          <a:lstStyle/>
-          <a:p>
-            <a:pPr indent="0" marL="0">
-              <a:buNone/>
-            </a:pPr>
-            <a:endParaRPr lang="en-US" dirty="0"/>
-          </a:p>
-        </p:txBody>
-      </p:sp>
-      <p:sp>
-        <p:nvSpPr>
-          <p:cNvPr id="3" name="Text 1"/>
-          <p:cNvSpPr/>
-          <p:nvPr/>
-        </p:nvSpPr>
-        <p:spPr>
-          <a:xfrm>
             <a:off x="634901" y="317450"/>
             <a:ext cx="8031682" cy="742950"/>
           </a:xfrm>
@@ -8669,7 +8174,7 @@
             <a:r>
               <a:rPr lang="en-US" sz="2600" b="1" dirty="0">
                 <a:solidFill>
-                  <a:srgbClr val="FFFFFF"/>
+                  <a:srgbClr val="1A237E"/>
                 </a:solidFill>
                 <a:latin typeface="Arial" pitchFamily="34" charset="0"/>
                 <a:ea typeface="Arial" pitchFamily="34" charset="-122"/>
@@ -8683,7 +8188,7 @@
       </p:sp>
       <p:sp>
         <p:nvSpPr>
-          <p:cNvPr id="4" name="Text 2"/>
+          <p:cNvPr id="3" name="Text 1"/>
           <p:cNvSpPr/>
           <p:nvPr/>
         </p:nvSpPr>
@@ -8728,7 +8233,7 @@
       </p:sp>
       <p:sp>
         <p:nvSpPr>
-          <p:cNvPr id="5" name="Text 3"/>
+          <p:cNvPr id="4" name="Text 2"/>
           <p:cNvSpPr/>
           <p:nvPr/>
         </p:nvSpPr>
@@ -8760,7 +8265,7 @@
             <a:r>
               <a:rPr lang="en-US" sz="1300" b="1" dirty="0">
                 <a:solidFill>
-                  <a:srgbClr val="26C6DA"/>
+                  <a:srgbClr val="00838F"/>
                 </a:solidFill>
                 <a:latin typeface="Arial" pitchFamily="34" charset="0"/>
                 <a:ea typeface="Arial" pitchFamily="34" charset="-122"/>
@@ -8794,7 +8299,7 @@
       </p:sp>
       <p:sp>
         <p:nvSpPr>
-          <p:cNvPr id="6" name="Text 4"/>
+          <p:cNvPr id="5" name="Text 3"/>
           <p:cNvSpPr/>
           <p:nvPr/>
         </p:nvSpPr>
@@ -8948,7 +8453,7 @@
       </p:sp>
       <p:sp>
         <p:nvSpPr>
-          <p:cNvPr id="7" name="Text 5"/>
+          <p:cNvPr id="6" name="Text 4"/>
           <p:cNvSpPr/>
           <p:nvPr/>
         </p:nvSpPr>
